--- a/content/decks/media-studies/media-studies-s1-lesson-11-representation-applied-to-your-own-product.pptx
+++ b/content/decks/media-studies/media-studies-s1-lesson-11-representation-applied-to-your-own-product.pptx
@@ -17,9 +17,10 @@
     <p:sldId id="265" r:id="rId11"/>
     <p:sldId id="266" r:id="rId12"/>
     <p:sldId id="267" r:id="rId13"/>
+    <p:sldId id="268" r:id="rId14"/>
   </p:sldIdLst>
   <p:notesMasterIdLst>
-    <p:notesMasterId r:id="rId14"/>
+    <p:notesMasterId r:id="rId15"/>
   </p:notesMasterIdLst>
   <p:sldSz cx="12192000" cy="6858000"/>
   <p:notesSz cx="6858000" cy="12192000"/>
@@ -601,7 +602,7 @@
           <a:p>
             <a:r>
               <a:rPr lang="en-US" dirty="0"/>
-              <a:t/>
+              <a:t>D3's case pair stays PROPOSED: one British TV stereotype, one Hollywood film stereotype, both exam-eligible, worked in groups with Hall's positions run across both. Deck U3.2 is the ready-made Hall lesson if wanted.</a:t>
             </a:r>
             <a:endParaRPr lang="en-US" dirty="0"/>
           </a:p>
@@ -689,7 +690,7 @@
           <a:p>
             <a:r>
               <a:rPr lang="en-US" dirty="0"/>
-              <a:t/>
+              <a:t>An international text the room meets again at L10 as the enigma frame; here the same still carries Hall's absence. The absence inventory then runs on one text and on their own C1 planning.</a:t>
             </a:r>
             <a:endParaRPr lang="en-US" dirty="0"/>
           </a:p>
@@ -777,7 +778,7 @@
           <a:p>
             <a:r>
               <a:rPr lang="en-US" dirty="0"/>
-              <a:t/>
+              <a:t>D5 screening conditions: no introductions, no apologies, no pausing; response cards completed while watching and handed to makers unread by anyone else. D6 converts findings to production pickups with dates; LB3 posted.</a:t>
             </a:r>
             <a:endParaRPr lang="en-US" dirty="0"/>
           </a:p>
@@ -801,6 +802,94 @@
             <a:fld id="{F7021451-1387-4CA6-816F-3879F97B5CBC}" type="slidenum">
               <a:rPr lang="en-US"/>
               <a:t>12</a:t>
+            </a:fld>
+            <a:endParaRPr lang="en-US"/>
+          </a:p>
+        </p:txBody>
+      </p:sp>
+    </p:spTree>
+    <p:extLst>
+      <p:ext uri="{BB962C8B-B14F-4D97-AF65-F5344CB8AC3E}">
+        <p14:creationId xmlns:p14="http://schemas.microsoft.com/office/powerpoint/2010/main" val="1024086991"/>
+      </p:ext>
+    </p:extLst>
+  </p:cSld>
+  <p:clrMapOvr>
+    <a:masterClrMapping/>
+  </p:clrMapOvr>
+</p:notes>
+</file>
+
+<file path=ppt/notesSlides/notesSlide13.xml><?xml version="1.0" encoding="utf-8"?>
+<p:notes xmlns:a="http://schemas.openxmlformats.org/drawingml/2006/main" xmlns:r="http://schemas.openxmlformats.org/officeDocument/2006/relationships" xmlns:p="http://schemas.openxmlformats.org/presentationml/2006/main">
+  <p:cSld>
+    <p:spTree>
+      <p:nvGrpSpPr>
+        <p:cNvPr id="1" name=""/>
+        <p:cNvGrpSpPr/>
+        <p:nvPr/>
+      </p:nvGrpSpPr>
+      <p:grpSpPr>
+        <a:xfrm>
+          <a:off x="0" y="0"/>
+          <a:ext cx="0" cy="0"/>
+          <a:chOff x="0" y="0"/>
+          <a:chExt cx="0" cy="0"/>
+        </a:xfrm>
+      </p:grpSpPr>
+      <p:sp>
+        <p:nvSpPr>
+          <p:cNvPr id="2" name="Slide Image Placeholder 1"/>
+          <p:cNvSpPr>
+            <a:spLocks noGrp="1" noRot="1" noChangeAspect="1"/>
+          </p:cNvSpPr>
+          <p:nvPr>
+            <p:ph type="sldImg"/>
+          </p:nvPr>
+        </p:nvSpPr>
+        <p:spPr/>
+      </p:sp>
+      <p:sp>
+        <p:nvSpPr>
+          <p:cNvPr id="3" name="Notes Placeholder 2"/>
+          <p:cNvSpPr>
+            <a:spLocks noGrp="1"/>
+          </p:cNvSpPr>
+          <p:nvPr>
+            <p:ph type="body" idx="1"/>
+          </p:nvPr>
+        </p:nvSpPr>
+        <p:spPr/>
+        <p:txBody>
+          <a:bodyPr/>
+          <a:lstStyle/>
+          <a:p>
+            <a:r>
+              <a:rPr lang="en-US" dirty="0"/>
+              <a:t/>
+            </a:r>
+            <a:endParaRPr lang="en-US" dirty="0"/>
+          </a:p>
+        </p:txBody>
+      </p:sp>
+      <p:sp>
+        <p:nvSpPr>
+          <p:cNvPr id="4" name="Slide Number Placeholder 3"/>
+          <p:cNvSpPr>
+            <a:spLocks noGrp="1"/>
+          </p:cNvSpPr>
+          <p:nvPr>
+            <p:ph type="sldNum" sz="quarter" idx="10"/>
+          </p:nvPr>
+        </p:nvSpPr>
+        <p:spPr/>
+        <p:txBody>
+          <a:bodyPr/>
+          <a:lstStyle/>
+          <a:p>
+            <a:fld id="{F7021451-1387-4CA6-816F-3879F97B5CBC}" type="slidenum">
+              <a:rPr lang="en-US"/>
+              <a:t>13</a:t>
             </a:fld>
             <a:endParaRPr lang="en-US"/>
           </a:p>
@@ -1129,7 +1218,7 @@
           <a:p>
             <a:r>
               <a:rPr lang="en-US" dirty="0"/>
-              <a:t/>
+              <a:t>Coursebook 3.3's own phrase: never objective. The same-person-three-ways exercise (official portrait, news photo, fan edit of one figure the room knows) runs live after this; choosing the figure stays a classroom decision, per the plan's caution against active PRC political figures.</a:t>
             </a:r>
             <a:endParaRPr lang="en-US" dirty="0"/>
           </a:p>
@@ -1217,7 +1306,7 @@
           <a:p>
             <a:r>
               <a:rPr lang="en-US" dirty="0"/>
-              <a:t/>
+              <a:t>One shared text on screen for the corners; a Downton frame from the next slide serves twice. Theory card: Hall.</a:t>
             </a:r>
             <a:endParaRPr lang="en-US" dirty="0"/>
           </a:p>
@@ -1481,7 +1570,7 @@
           <a:p>
             <a:r>
               <a:rPr lang="en-US" dirty="0"/>
-              <a:t/>
+              <a:t>D3's 25-minute block, previously slide-less. The coursebook's own-country prompt closes the block as a short spoken aside, as contrast, never as the written outcome, per the exam-example rule.</a:t>
             </a:r>
             <a:endParaRPr lang="en-US" dirty="0"/>
           </a:p>
@@ -2109,7 +2198,7 @@
     <p:bg>
       <p:bgPr>
         <a:solidFill>
-          <a:srgbClr val="E8EFE7"/>
+          <a:srgbClr val="FAF8F1"/>
         </a:solidFill>
       </p:bgPr>
     </p:bg>
@@ -2135,108 +2224,147 @@
         </p:nvSpPr>
         <p:spPr>
           <a:xfrm>
-            <a:off x="502920" y="548640"/>
-            <a:ext cx="1828800" cy="1828800"/>
-          </a:xfrm>
-          <a:prstGeom prst="rect">
-            <a:avLst/>
-          </a:prstGeom>
-          <a:noFill/>
-          <a:ln/>
-        </p:spPr>
-        <p:txBody>
-          <a:bodyPr wrap="square" lIns="0" tIns="0" rIns="0" bIns="0" rtlCol="0" anchor="t"/>
+            <a:off x="822960" y="457200"/>
+            <a:ext cx="6400800" cy="274320"/>
+          </a:xfrm>
+          <a:prstGeom prst="rect">
+            <a:avLst/>
+          </a:prstGeom>
+          <a:noFill/>
+          <a:ln/>
+        </p:spPr>
+        <p:txBody>
+          <a:bodyPr wrap="square" lIns="0" tIns="0" rIns="0" bIns="0" rtlCol="0" anchor="ctr"/>
+          <a:lstStyle/>
+          <a:p>
+            <a:pPr algn="l" indent="0" marL="0">
+              <a:buNone/>
+            </a:pPr>
+            <a:r>
+              <a:rPr lang="en-US" sz="1100" b="1" spc="250" kern="0" dirty="0">
+                <a:solidFill>
+                  <a:srgbClr val="4A6B5D"/>
+                </a:solidFill>
+                <a:latin typeface="Arial" pitchFamily="34" charset="0"/>
+                <a:ea typeface="Arial" pitchFamily="34" charset="-122"/>
+                <a:cs typeface="Arial" pitchFamily="34" charset="-120"/>
+              </a:rPr>
+              <a:t>STEREOTYPING AS POWER</a:t>
+            </a:r>
+            <a:endParaRPr lang="en-US" sz="1100" dirty="0"/>
+          </a:p>
+        </p:txBody>
+      </p:sp>
+      <p:sp>
+        <p:nvSpPr>
+          <p:cNvPr id="3" name="Text 1"/>
+          <p:cNvSpPr/>
+          <p:nvPr/>
+        </p:nvSpPr>
+        <p:spPr>
+          <a:xfrm>
+            <a:off x="6793992" y="457200"/>
+            <a:ext cx="4572000" cy="274320"/>
+          </a:xfrm>
+          <a:prstGeom prst="rect">
+            <a:avLst/>
+          </a:prstGeom>
+          <a:noFill/>
+          <a:ln/>
+        </p:spPr>
+        <p:txBody>
+          <a:bodyPr wrap="square" lIns="0" tIns="0" rIns="0" bIns="0" rtlCol="0" anchor="ctr"/>
+          <a:lstStyle/>
+          <a:p>
+            <a:pPr algn="r" indent="0" marL="0">
+              <a:buNone/>
+            </a:pPr>
+            <a:r>
+              <a:rPr lang="en-US" sz="1100" b="1" spc="250" kern="0" dirty="0">
+                <a:solidFill>
+                  <a:srgbClr val="7A7F72"/>
+                </a:solidFill>
+                <a:latin typeface="Arial" pitchFamily="34" charset="0"/>
+                <a:ea typeface="Arial" pitchFamily="34" charset="-122"/>
+                <a:cs typeface="Arial" pitchFamily="34" charset="-120"/>
+              </a:rPr>
+              <a:t>WHO BENEFITS, WHO PAYS</a:t>
+            </a:r>
+            <a:endParaRPr lang="en-US" sz="1100" dirty="0"/>
+          </a:p>
+        </p:txBody>
+      </p:sp>
+      <p:sp>
+        <p:nvSpPr>
+          <p:cNvPr id="4" name="Shape 2"/>
+          <p:cNvSpPr/>
+          <p:nvPr/>
+        </p:nvSpPr>
+        <p:spPr>
+          <a:xfrm>
+            <a:off x="822960" y="786384"/>
+            <a:ext cx="10543032" cy="0"/>
+          </a:xfrm>
+          <a:prstGeom prst="line">
+            <a:avLst/>
+          </a:prstGeom>
+          <a:noFill/>
+          <a:ln w="9525">
+            <a:solidFill>
+              <a:srgbClr val="D9D4C4"/>
+            </a:solidFill>
+            <a:prstDash val="solid"/>
+          </a:ln>
+        </p:spPr>
+      </p:sp>
+      <p:sp>
+        <p:nvSpPr>
+          <p:cNvPr id="5" name="Text 3"/>
+          <p:cNvSpPr/>
+          <p:nvPr/>
+        </p:nvSpPr>
+        <p:spPr>
+          <a:xfrm>
+            <a:off x="822960" y="1051560"/>
+            <a:ext cx="6400800" cy="822960"/>
+          </a:xfrm>
+          <a:prstGeom prst="rect">
+            <a:avLst/>
+          </a:prstGeom>
+          <a:noFill/>
+          <a:ln/>
+        </p:spPr>
+        <p:txBody>
+          <a:bodyPr wrap="square" lIns="0" tIns="0" rIns="0" bIns="0" rtlCol="0" anchor="ctr"/>
           <a:lstStyle/>
           <a:p>
             <a:pPr indent="0" marL="0">
               <a:buNone/>
             </a:pPr>
             <a:r>
-              <a:rPr lang="en-US" sz="20000" dirty="0">
-                <a:solidFill>
-                  <a:srgbClr val="A3C1AD"/>
+              <a:rPr lang="en-US" sz="3200" dirty="0">
+                <a:solidFill>
+                  <a:srgbClr val="24313F"/>
                 </a:solidFill>
                 <a:latin typeface="Georgia" pitchFamily="34" charset="0"/>
                 <a:ea typeface="Georgia" pitchFamily="34" charset="-122"/>
                 <a:cs typeface="Georgia" pitchFamily="34" charset="-120"/>
               </a:rPr>
-              <a:t>“</a:t>
-            </a:r>
-            <a:endParaRPr lang="en-US" sz="20000" dirty="0"/>
-          </a:p>
-        </p:txBody>
-      </p:sp>
-      <p:sp>
-        <p:nvSpPr>
-          <p:cNvPr id="3" name="Text 1"/>
-          <p:cNvSpPr/>
-          <p:nvPr/>
-        </p:nvSpPr>
-        <p:spPr>
-          <a:xfrm>
-            <a:off x="822960" y="1920240"/>
-            <a:ext cx="10424160" cy="2194560"/>
-          </a:xfrm>
-          <a:prstGeom prst="rect">
-            <a:avLst/>
-          </a:prstGeom>
-          <a:noFill/>
-          <a:ln/>
-        </p:spPr>
-        <p:txBody>
-          <a:bodyPr wrap="square" lIns="0" tIns="0" rIns="0" bIns="0" rtlCol="0" anchor="ctr"/>
-          <a:lstStyle/>
-          <a:p>
-            <a:pPr indent="0" marL="0">
-              <a:lnSpc>
-                <a:spcPts val="5000"/>
-              </a:lnSpc>
-              <a:buNone/>
-            </a:pPr>
-            <a:r>
-              <a:rPr lang="en-US" sz="4200" dirty="0">
-                <a:solidFill>
-                  <a:srgbClr val="24313F"/>
-                </a:solidFill>
-                <a:latin typeface="Georgia" pitchFamily="34" charset="0"/>
-                <a:ea typeface="Georgia" pitchFamily="34" charset="-122"/>
-                <a:cs typeface="Georgia" pitchFamily="34" charset="-120"/>
-              </a:rPr>
-              <a:t>What is never in the frame</a:t>
-            </a:r>
-            <a:endParaRPr lang="en-US" sz="4200" dirty="0"/>
-          </a:p>
-          <a:p>
-            <a:pPr indent="0" marL="0">
-              <a:lnSpc>
-                <a:spcPts val="5000"/>
-              </a:lnSpc>
-              <a:buNone/>
-            </a:pPr>
-            <a:r>
-              <a:rPr lang="en-US" sz="4200" dirty="0">
-                <a:solidFill>
-                  <a:srgbClr val="24313F"/>
-                </a:solidFill>
-                <a:latin typeface="Georgia" pitchFamily="34" charset="0"/>
-                <a:ea typeface="Georgia" pitchFamily="34" charset="-122"/>
-                <a:cs typeface="Georgia" pitchFamily="34" charset="-120"/>
-              </a:rPr>
-              <a:t>cannot be argued with.</a:t>
-            </a:r>
-            <a:endParaRPr lang="en-US" sz="4200" dirty="0"/>
-          </a:p>
-        </p:txBody>
-      </p:sp>
-      <p:sp>
-        <p:nvSpPr>
-          <p:cNvPr id="4" name="Shape 2"/>
-          <p:cNvSpPr/>
-          <p:nvPr/>
-        </p:nvSpPr>
-        <p:spPr>
-          <a:xfrm>
-            <a:off x="822960" y="4663440"/>
+              <a:t>A shortcut with a beneficiary</a:t>
+            </a:r>
+            <a:endParaRPr lang="en-US" sz="3200" dirty="0"/>
+          </a:p>
+        </p:txBody>
+      </p:sp>
+      <p:sp>
+        <p:nvSpPr>
+          <p:cNvPr id="6" name="Shape 4"/>
+          <p:cNvSpPr/>
+          <p:nvPr/>
+        </p:nvSpPr>
+        <p:spPr>
+          <a:xfrm>
+            <a:off x="822960" y="2057400"/>
             <a:ext cx="914400" cy="0"/>
           </a:xfrm>
           <a:prstGeom prst="line">
@@ -2253,40 +2381,264 @@
       </p:sp>
       <p:sp>
         <p:nvSpPr>
-          <p:cNvPr id="5" name="Text 3"/>
-          <p:cNvSpPr/>
-          <p:nvPr/>
-        </p:nvSpPr>
-        <p:spPr>
-          <a:xfrm>
-            <a:off x="822960" y="4846320"/>
-            <a:ext cx="10241280" cy="457200"/>
-          </a:xfrm>
-          <a:prstGeom prst="rect">
-            <a:avLst/>
-          </a:prstGeom>
-          <a:noFill/>
-          <a:ln/>
-        </p:spPr>
-        <p:txBody>
-          <a:bodyPr wrap="square" lIns="0" tIns="0" rIns="0" bIns="0" rtlCol="0" anchor="ctr"/>
+          <p:cNvPr id="7" name="Text 5"/>
+          <p:cNvSpPr/>
+          <p:nvPr/>
+        </p:nvSpPr>
+        <p:spPr>
+          <a:xfrm>
+            <a:off x="822960" y="2286000"/>
+            <a:ext cx="6400800" cy="3291840"/>
+          </a:xfrm>
+          <a:prstGeom prst="rect">
+            <a:avLst/>
+          </a:prstGeom>
+          <a:noFill/>
+          <a:ln/>
+        </p:spPr>
+        <p:txBody>
+          <a:bodyPr wrap="square" lIns="0" tIns="0" rIns="0" bIns="0" rtlCol="0" anchor="t"/>
           <a:lstStyle/>
           <a:p>
             <a:pPr indent="0" marL="0">
-              <a:buNone/>
-            </a:pPr>
-            <a:r>
-              <a:rPr lang="en-US" sz="1400" spc="100" kern="0" dirty="0">
-                <a:solidFill>
-                  <a:srgbClr val="4A6B5D"/>
+              <a:lnSpc>
+                <a:spcPts val="2400"/>
+              </a:lnSpc>
+              <a:buNone/>
+            </a:pPr>
+            <a:r>
+              <a:rPr lang="en-US" sz="1700" dirty="0">
+                <a:solidFill>
+                  <a:srgbClr val="24313F"/>
+                </a:solidFill>
+                <a:latin typeface="Georgia" pitchFamily="34" charset="0"/>
+                <a:ea typeface="Georgia" pitchFamily="34" charset="-122"/>
+                <a:cs typeface="Georgia" pitchFamily="34" charset="-120"/>
+              </a:rPr>
+              <a:t>A stereotype is not a lie. It is a shortcut, and every shortcut has a beneficiary and someone who pays the toll. Ask both questions of every case: who is served by this being the quick version, and who is cost by it?</a:t>
+            </a:r>
+            <a:endParaRPr lang="en-US" sz="1700" dirty="0"/>
+          </a:p>
+          <a:p>
+            <a:pPr indent="0" marL="0">
+              <a:lnSpc>
+                <a:spcPts val="2400"/>
+              </a:lnSpc>
+              <a:buNone/>
+            </a:pPr>
+            <a:endParaRPr lang="en-US" sz="1700" dirty="0"/>
+          </a:p>
+          <a:p>
+            <a:pPr indent="0" marL="0">
+              <a:lnSpc>
+                <a:spcPts val="2400"/>
+              </a:lnSpc>
+              <a:buNone/>
+            </a:pPr>
+            <a:r>
+              <a:rPr lang="en-US" sz="1700" dirty="0">
+                <a:solidFill>
+                  <a:srgbClr val="24313F"/>
+                </a:solidFill>
+                <a:latin typeface="Georgia" pitchFamily="34" charset="0"/>
+                <a:ea typeface="Georgia" pitchFamily="34" charset="-122"/>
+                <a:cs typeface="Georgia" pitchFamily="34" charset="-120"/>
+              </a:rPr>
+              <a:t>A counter-stereotype registers as surprising only because the shortcut is so well worn: a grieving old man as an action hero surprises exactly once, and the surprise is the evidence.</a:t>
+            </a:r>
+            <a:endParaRPr lang="en-US" sz="1700" dirty="0"/>
+          </a:p>
+        </p:txBody>
+      </p:sp>
+      <p:sp>
+        <p:nvSpPr>
+          <p:cNvPr id="8" name="Shape 6"/>
+          <p:cNvSpPr/>
+          <p:nvPr/>
+        </p:nvSpPr>
+        <p:spPr>
+          <a:xfrm>
+            <a:off x="7589520" y="1188720"/>
+            <a:ext cx="3794760" cy="4023360"/>
+          </a:xfrm>
+          <a:prstGeom prst="rect">
+            <a:avLst/>
+          </a:prstGeom>
+          <a:solidFill>
+            <a:srgbClr val="FAF8F1"/>
+          </a:solidFill>
+          <a:ln w="9525">
+            <a:solidFill>
+              <a:srgbClr val="D9D4C4"/>
+            </a:solidFill>
+            <a:prstDash val="solid"/>
+          </a:ln>
+        </p:spPr>
+      </p:sp>
+      <p:pic>
+        <p:nvPicPr>
+          <p:cNvPr id="9" name="Image 0" descr="/Users/dogan/Documents/Vaults/Courses/wiki/classes/media-studies/decks/_build/img/up-carl.jpg">    </p:cNvPr>
+          <p:cNvPicPr>
+            <a:picLocks noChangeAspect="1"/>
+          </p:cNvPicPr>
+          <p:nvPr/>
+        </p:nvPicPr>
+        <p:blipFill>
+          <a:blip r:embed="rId1"/>
+          <a:stretch>
+            <a:fillRect/>
+          </a:stretch>
+        </p:blipFill>
+        <p:spPr>
+          <a:xfrm>
+            <a:off x="7717536" y="2205133"/>
+            <a:ext cx="3538728" cy="1990535"/>
+          </a:xfrm>
+          <a:prstGeom prst="rect">
+            <a:avLst/>
+          </a:prstGeom>
+        </p:spPr>
+      </p:pic>
+      <p:sp>
+        <p:nvSpPr>
+          <p:cNvPr id="10" name="Text 7"/>
+          <p:cNvSpPr/>
+          <p:nvPr/>
+        </p:nvSpPr>
+        <p:spPr>
+          <a:xfrm>
+            <a:off x="7589520" y="5257800"/>
+            <a:ext cx="3794760" cy="457200"/>
+          </a:xfrm>
+          <a:prstGeom prst="rect">
+            <a:avLst/>
+          </a:prstGeom>
+          <a:noFill/>
+          <a:ln/>
+        </p:spPr>
+        <p:txBody>
+          <a:bodyPr wrap="square" lIns="0" tIns="0" rIns="0" bIns="0" rtlCol="0" anchor="t"/>
+          <a:lstStyle/>
+          <a:p>
+            <a:pPr algn="ctr" indent="0" marL="0">
+              <a:lnSpc>
+                <a:spcPts val="1300"/>
+              </a:lnSpc>
+              <a:buNone/>
+            </a:pPr>
+            <a:r>
+              <a:rPr lang="en-US" sz="1000" dirty="0">
+                <a:solidFill>
+                  <a:srgbClr val="7A7F72"/>
                 </a:solidFill>
                 <a:latin typeface="Arial" pitchFamily="34" charset="0"/>
                 <a:ea typeface="Arial" pitchFamily="34" charset="-122"/>
                 <a:cs typeface="Arial" pitchFamily="34" charset="-120"/>
               </a:rPr>
-              <a:t>Who never appears cannot complain. Run the inventory on your own product: who is missing, and did you choose that or default to it?</a:t>
-            </a:r>
-            <a:endParaRPr lang="en-US" sz="1400" dirty="0"/>
+              <a:t>UP (2009, Pixar): Carl, the coursebook's own counter-stereotype</a:t>
+            </a:r>
+            <a:endParaRPr lang="en-US" sz="1000" dirty="0"/>
+          </a:p>
+        </p:txBody>
+      </p:sp>
+      <p:sp>
+        <p:nvSpPr>
+          <p:cNvPr id="11" name="Shape 8"/>
+          <p:cNvSpPr/>
+          <p:nvPr/>
+        </p:nvSpPr>
+        <p:spPr>
+          <a:xfrm>
+            <a:off x="822960" y="6382512"/>
+            <a:ext cx="10543032" cy="0"/>
+          </a:xfrm>
+          <a:prstGeom prst="line">
+            <a:avLst/>
+          </a:prstGeom>
+          <a:noFill/>
+          <a:ln w="9525">
+            <a:solidFill>
+              <a:srgbClr val="D9D4C4"/>
+            </a:solidFill>
+            <a:prstDash val="solid"/>
+          </a:ln>
+        </p:spPr>
+      </p:sp>
+      <p:sp>
+        <p:nvSpPr>
+          <p:cNvPr id="12" name="Text 9"/>
+          <p:cNvSpPr/>
+          <p:nvPr/>
+        </p:nvSpPr>
+        <p:spPr>
+          <a:xfrm>
+            <a:off x="822960" y="6419088"/>
+            <a:ext cx="7315200" cy="274320"/>
+          </a:xfrm>
+          <a:prstGeom prst="rect">
+            <a:avLst/>
+          </a:prstGeom>
+          <a:noFill/>
+          <a:ln/>
+        </p:spPr>
+        <p:txBody>
+          <a:bodyPr wrap="square" lIns="0" tIns="0" rIns="0" bIns="0" rtlCol="0" anchor="ctr"/>
+          <a:lstStyle/>
+          <a:p>
+            <a:pPr indent="0" marL="0">
+              <a:buNone/>
+            </a:pPr>
+            <a:r>
+              <a:rPr lang="en-US" sz="900" spc="150" kern="0" dirty="0">
+                <a:solidFill>
+                  <a:srgbClr val="7A7F72"/>
+                </a:solidFill>
+                <a:latin typeface="Arial" pitchFamily="34" charset="0"/>
+                <a:ea typeface="Arial" pitchFamily="34" charset="-122"/>
+                <a:cs typeface="Arial" pitchFamily="34" charset="-120"/>
+              </a:rPr>
+              <a:t>MEDIA STUDIES 9607 · SEMESTER I</a:t>
+            </a:r>
+            <a:endParaRPr lang="en-US" sz="900" dirty="0"/>
+          </a:p>
+        </p:txBody>
+      </p:sp>
+      <p:sp>
+        <p:nvSpPr>
+          <p:cNvPr id="13" name="Text 10"/>
+          <p:cNvSpPr/>
+          <p:nvPr/>
+        </p:nvSpPr>
+        <p:spPr>
+          <a:xfrm>
+            <a:off x="10268712" y="6355080"/>
+            <a:ext cx="1097280" cy="365760"/>
+          </a:xfrm>
+          <a:prstGeom prst="rect">
+            <a:avLst/>
+          </a:prstGeom>
+          <a:noFill/>
+          <a:ln/>
+        </p:spPr>
+        <p:txBody>
+          <a:bodyPr wrap="square" lIns="0" tIns="0" rIns="0" bIns="0" rtlCol="0" anchor="ctr"/>
+          <a:lstStyle/>
+          <a:p>
+            <a:pPr algn="r" indent="0" marL="0">
+              <a:buNone/>
+            </a:pPr>
+            <a:r>
+              <a:rPr lang="en-US" sz="1600" dirty="0">
+                <a:solidFill>
+                  <a:srgbClr val="A3C1AD"/>
+                </a:solidFill>
+                <a:latin typeface="Georgia" pitchFamily="34" charset="0"/>
+                <a:ea typeface="Georgia" pitchFamily="34" charset="-122"/>
+                <a:cs typeface="Georgia" pitchFamily="34" charset="-120"/>
+              </a:rPr>
+              <a:t>04</a:t>
+            </a:r>
+            <a:endParaRPr lang="en-US" sz="1600" dirty="0"/>
           </a:p>
         </p:txBody>
       </p:sp>
@@ -2355,7 +2707,7 @@
                 <a:ea typeface="Arial" pitchFamily="34" charset="-122"/>
                 <a:cs typeface="Arial" pitchFamily="34" charset="-120"/>
               </a:rPr>
-              <a:t>THE SELF-AUDIT</a:t>
+              <a:t>ABSENCE</a:t>
             </a:r>
             <a:endParaRPr lang="en-US" sz="1100" dirty="0"/>
           </a:p>
@@ -2394,7 +2746,7 @@
                 <a:ea typeface="Arial" pitchFamily="34" charset="-122"/>
                 <a:cs typeface="Arial" pitchFamily="34" charset="-120"/>
               </a:rPr>
-              <a:t>THE WEEK'S FULL TOOLKIT, ON YOUR OWN CUT</a:t>
+              <a:t>SELECTIVE CONSTRUCTION'S QUIETEST TOOL</a:t>
             </a:r>
             <a:endParaRPr lang="en-US" sz="1100" dirty="0"/>
           </a:p>
@@ -2425,577 +2777,21 @@
       </p:sp>
       <p:sp>
         <p:nvSpPr>
-          <p:cNvPr id="5" name="Text 3"/>
-          <p:cNvSpPr/>
-          <p:nvPr/>
-        </p:nvSpPr>
-        <p:spPr>
-          <a:xfrm>
-            <a:off x="822960" y="932688"/>
-            <a:ext cx="10543032" cy="640080"/>
-          </a:xfrm>
-          <a:prstGeom prst="rect">
-            <a:avLst/>
-          </a:prstGeom>
-          <a:noFill/>
-          <a:ln/>
-        </p:spPr>
-        <p:txBody>
-          <a:bodyPr wrap="square" lIns="0" tIns="0" rIns="0" bIns="0" rtlCol="0" anchor="ctr"/>
-          <a:lstStyle/>
-          <a:p>
-            <a:pPr indent="0" marL="0">
-              <a:buNone/>
-            </a:pPr>
-            <a:r>
-              <a:rPr lang="en-US" sz="3000" dirty="0">
-                <a:solidFill>
-                  <a:srgbClr val="24313F"/>
-                </a:solidFill>
-                <a:latin typeface="Georgia" pitchFamily="34" charset="0"/>
-                <a:ea typeface="Georgia" pitchFamily="34" charset="-122"/>
-                <a:cs typeface="Georgia" pitchFamily="34" charset="-120"/>
-              </a:rPr>
-              <a:t>Four questions of your own product</a:t>
-            </a:r>
-            <a:endParaRPr lang="en-US" sz="3000" dirty="0"/>
-          </a:p>
-        </p:txBody>
-      </p:sp>
-      <p:sp>
-        <p:nvSpPr>
-          <p:cNvPr id="6" name="Text 4"/>
-          <p:cNvSpPr/>
-          <p:nvPr/>
-        </p:nvSpPr>
-        <p:spPr>
-          <a:xfrm>
-            <a:off x="822960" y="1920240"/>
-            <a:ext cx="914400" cy="548640"/>
-          </a:xfrm>
-          <a:prstGeom prst="rect">
-            <a:avLst/>
-          </a:prstGeom>
-          <a:noFill/>
-          <a:ln/>
-        </p:spPr>
-        <p:txBody>
-          <a:bodyPr wrap="square" lIns="0" tIns="0" rIns="0" bIns="0" rtlCol="0" anchor="ctr"/>
-          <a:lstStyle/>
-          <a:p>
-            <a:pPr indent="0" marL="0">
-              <a:buNone/>
-            </a:pPr>
-            <a:r>
-              <a:rPr lang="en-US" sz="3000" dirty="0">
-                <a:solidFill>
-                  <a:srgbClr val="A3C1AD"/>
-                </a:solidFill>
-                <a:latin typeface="Georgia" pitchFamily="34" charset="0"/>
-                <a:ea typeface="Georgia" pitchFamily="34" charset="-122"/>
-                <a:cs typeface="Georgia" pitchFamily="34" charset="-120"/>
-              </a:rPr>
-              <a:t>01</a:t>
-            </a:r>
-            <a:endParaRPr lang="en-US" sz="3000" dirty="0"/>
-          </a:p>
-        </p:txBody>
-      </p:sp>
-      <p:sp>
-        <p:nvSpPr>
-          <p:cNvPr id="7" name="Text 5"/>
-          <p:cNvSpPr/>
-          <p:nvPr/>
-        </p:nvSpPr>
-        <p:spPr>
-          <a:xfrm>
-            <a:off x="1737360" y="1938528"/>
-            <a:ext cx="4082796" cy="457200"/>
-          </a:xfrm>
-          <a:prstGeom prst="rect">
-            <a:avLst/>
-          </a:prstGeom>
-          <a:noFill/>
-          <a:ln/>
-        </p:spPr>
-        <p:txBody>
-          <a:bodyPr wrap="square" lIns="0" tIns="0" rIns="0" bIns="0" rtlCol="0" anchor="ctr"/>
-          <a:lstStyle/>
-          <a:p>
-            <a:pPr indent="0" marL="0">
-              <a:buNone/>
-            </a:pPr>
-            <a:r>
-              <a:rPr lang="en-US" sz="2300" dirty="0">
-                <a:solidFill>
-                  <a:srgbClr val="4A6B5D"/>
-                </a:solidFill>
-                <a:latin typeface="Georgia" pitchFamily="34" charset="0"/>
-                <a:ea typeface="Georgia" pitchFamily="34" charset="-122"/>
-                <a:cs typeface="Georgia" pitchFamily="34" charset="-120"/>
-              </a:rPr>
-              <a:t>Construction</a:t>
-            </a:r>
-            <a:endParaRPr lang="en-US" sz="2300" dirty="0"/>
-          </a:p>
-        </p:txBody>
-      </p:sp>
-      <p:sp>
-        <p:nvSpPr>
-          <p:cNvPr id="8" name="Text 6"/>
-          <p:cNvSpPr/>
-          <p:nvPr/>
-        </p:nvSpPr>
-        <p:spPr>
-          <a:xfrm>
-            <a:off x="1737360" y="2468880"/>
-            <a:ext cx="4082796" cy="1188720"/>
-          </a:xfrm>
-          <a:prstGeom prst="rect">
-            <a:avLst/>
-          </a:prstGeom>
-          <a:noFill/>
-          <a:ln/>
-        </p:spPr>
-        <p:txBody>
-          <a:bodyPr wrap="square" lIns="0" tIns="0" rIns="0" bIns="0" rtlCol="0" anchor="t"/>
-          <a:lstStyle/>
-          <a:p>
-            <a:pPr indent="0" marL="0">
-              <a:lnSpc>
-                <a:spcPts val="2100"/>
-              </a:lnSpc>
-              <a:buNone/>
-            </a:pPr>
-            <a:r>
-              <a:rPr lang="en-US" sz="1550" dirty="0">
-                <a:solidFill>
-                  <a:srgbClr val="24313F"/>
-                </a:solidFill>
-                <a:latin typeface="Georgia" pitchFamily="34" charset="0"/>
-                <a:ea typeface="Georgia" pitchFamily="34" charset="-122"/>
-                <a:cs typeface="Georgia" pitchFamily="34" charset="-120"/>
-              </a:rPr>
-              <a:t>What did we select and combine, and what did that leave out?</a:t>
-            </a:r>
-            <a:endParaRPr lang="en-US" sz="1550" dirty="0"/>
-          </a:p>
-        </p:txBody>
-      </p:sp>
-      <p:sp>
-        <p:nvSpPr>
-          <p:cNvPr id="9" name="Text 7"/>
-          <p:cNvSpPr/>
-          <p:nvPr/>
-        </p:nvSpPr>
-        <p:spPr>
-          <a:xfrm>
-            <a:off x="6368796" y="1920240"/>
-            <a:ext cx="914400" cy="548640"/>
-          </a:xfrm>
-          <a:prstGeom prst="rect">
-            <a:avLst/>
-          </a:prstGeom>
-          <a:noFill/>
-          <a:ln/>
-        </p:spPr>
-        <p:txBody>
-          <a:bodyPr wrap="square" lIns="0" tIns="0" rIns="0" bIns="0" rtlCol="0" anchor="ctr"/>
-          <a:lstStyle/>
-          <a:p>
-            <a:pPr indent="0" marL="0">
-              <a:buNone/>
-            </a:pPr>
-            <a:r>
-              <a:rPr lang="en-US" sz="3000" dirty="0">
-                <a:solidFill>
-                  <a:srgbClr val="A3C1AD"/>
-                </a:solidFill>
-                <a:latin typeface="Georgia" pitchFamily="34" charset="0"/>
-                <a:ea typeface="Georgia" pitchFamily="34" charset="-122"/>
-                <a:cs typeface="Georgia" pitchFamily="34" charset="-120"/>
-              </a:rPr>
-              <a:t>02</a:t>
-            </a:r>
-            <a:endParaRPr lang="en-US" sz="3000" dirty="0"/>
-          </a:p>
-        </p:txBody>
-      </p:sp>
-      <p:sp>
-        <p:nvSpPr>
-          <p:cNvPr id="10" name="Text 8"/>
-          <p:cNvSpPr/>
-          <p:nvPr/>
-        </p:nvSpPr>
-        <p:spPr>
-          <a:xfrm>
-            <a:off x="7283196" y="1938528"/>
-            <a:ext cx="4082796" cy="457200"/>
-          </a:xfrm>
-          <a:prstGeom prst="rect">
-            <a:avLst/>
-          </a:prstGeom>
-          <a:noFill/>
-          <a:ln/>
-        </p:spPr>
-        <p:txBody>
-          <a:bodyPr wrap="square" lIns="0" tIns="0" rIns="0" bIns="0" rtlCol="0" anchor="ctr"/>
-          <a:lstStyle/>
-          <a:p>
-            <a:pPr indent="0" marL="0">
-              <a:buNone/>
-            </a:pPr>
-            <a:r>
-              <a:rPr lang="en-US" sz="2300" dirty="0">
-                <a:solidFill>
-                  <a:srgbClr val="4A6B5D"/>
-                </a:solidFill>
-                <a:latin typeface="Georgia" pitchFamily="34" charset="0"/>
-                <a:ea typeface="Georgia" pitchFamily="34" charset="-122"/>
-                <a:cs typeface="Georgia" pitchFamily="34" charset="-120"/>
-              </a:rPr>
-              <a:t>Positions</a:t>
-            </a:r>
-            <a:endParaRPr lang="en-US" sz="2300" dirty="0"/>
-          </a:p>
-        </p:txBody>
-      </p:sp>
-      <p:sp>
-        <p:nvSpPr>
-          <p:cNvPr id="11" name="Text 9"/>
-          <p:cNvSpPr/>
-          <p:nvPr/>
-        </p:nvSpPr>
-        <p:spPr>
-          <a:xfrm>
-            <a:off x="7283196" y="2468880"/>
-            <a:ext cx="4082796" cy="1188720"/>
-          </a:xfrm>
-          <a:prstGeom prst="rect">
-            <a:avLst/>
-          </a:prstGeom>
-          <a:noFill/>
-          <a:ln/>
-        </p:spPr>
-        <p:txBody>
-          <a:bodyPr wrap="square" lIns="0" tIns="0" rIns="0" bIns="0" rtlCol="0" anchor="t"/>
-          <a:lstStyle/>
-          <a:p>
-            <a:pPr indent="0" marL="0">
-              <a:lnSpc>
-                <a:spcPts val="2100"/>
-              </a:lnSpc>
-              <a:buNone/>
-            </a:pPr>
-            <a:r>
-              <a:rPr lang="en-US" sz="1550" dirty="0">
-                <a:solidFill>
-                  <a:srgbClr val="24313F"/>
-                </a:solidFill>
-                <a:latin typeface="Georgia" pitchFamily="34" charset="0"/>
-                <a:ea typeface="Georgia" pitchFamily="34" charset="-122"/>
-                <a:cs typeface="Georgia" pitchFamily="34" charset="-120"/>
-              </a:rPr>
-              <a:t>What reading did we assume our audience would take?</a:t>
-            </a:r>
-            <a:endParaRPr lang="en-US" sz="1550" dirty="0"/>
-          </a:p>
-        </p:txBody>
-      </p:sp>
-      <p:sp>
-        <p:nvSpPr>
-          <p:cNvPr id="12" name="Text 10"/>
-          <p:cNvSpPr/>
-          <p:nvPr/>
-        </p:nvSpPr>
-        <p:spPr>
-          <a:xfrm>
-            <a:off x="822960" y="4114800"/>
-            <a:ext cx="914400" cy="548640"/>
-          </a:xfrm>
-          <a:prstGeom prst="rect">
-            <a:avLst/>
-          </a:prstGeom>
-          <a:noFill/>
-          <a:ln/>
-        </p:spPr>
-        <p:txBody>
-          <a:bodyPr wrap="square" lIns="0" tIns="0" rIns="0" bIns="0" rtlCol="0" anchor="ctr"/>
-          <a:lstStyle/>
-          <a:p>
-            <a:pPr indent="0" marL="0">
-              <a:buNone/>
-            </a:pPr>
-            <a:r>
-              <a:rPr lang="en-US" sz="3000" dirty="0">
-                <a:solidFill>
-                  <a:srgbClr val="A3C1AD"/>
-                </a:solidFill>
-                <a:latin typeface="Georgia" pitchFamily="34" charset="0"/>
-                <a:ea typeface="Georgia" pitchFamily="34" charset="-122"/>
-                <a:cs typeface="Georgia" pitchFamily="34" charset="-120"/>
-              </a:rPr>
-              <a:t>03</a:t>
-            </a:r>
-            <a:endParaRPr lang="en-US" sz="3000" dirty="0"/>
-          </a:p>
-        </p:txBody>
-      </p:sp>
-      <p:sp>
-        <p:nvSpPr>
-          <p:cNvPr id="13" name="Text 11"/>
-          <p:cNvSpPr/>
-          <p:nvPr/>
-        </p:nvSpPr>
-        <p:spPr>
-          <a:xfrm>
-            <a:off x="1737360" y="4133088"/>
-            <a:ext cx="4082796" cy="457200"/>
-          </a:xfrm>
-          <a:prstGeom prst="rect">
-            <a:avLst/>
-          </a:prstGeom>
-          <a:noFill/>
-          <a:ln/>
-        </p:spPr>
-        <p:txBody>
-          <a:bodyPr wrap="square" lIns="0" tIns="0" rIns="0" bIns="0" rtlCol="0" anchor="ctr"/>
-          <a:lstStyle/>
-          <a:p>
-            <a:pPr indent="0" marL="0">
-              <a:buNone/>
-            </a:pPr>
-            <a:r>
-              <a:rPr lang="en-US" sz="2300" dirty="0">
-                <a:solidFill>
-                  <a:srgbClr val="4A6B5D"/>
-                </a:solidFill>
-                <a:latin typeface="Georgia" pitchFamily="34" charset="0"/>
-                <a:ea typeface="Georgia" pitchFamily="34" charset="-122"/>
-                <a:cs typeface="Georgia" pitchFamily="34" charset="-120"/>
-              </a:rPr>
-              <a:t>Power</a:t>
-            </a:r>
-            <a:endParaRPr lang="en-US" sz="2300" dirty="0"/>
-          </a:p>
-        </p:txBody>
-      </p:sp>
-      <p:sp>
-        <p:nvSpPr>
-          <p:cNvPr id="14" name="Text 12"/>
-          <p:cNvSpPr/>
-          <p:nvPr/>
-        </p:nvSpPr>
-        <p:spPr>
-          <a:xfrm>
-            <a:off x="1737360" y="4663440"/>
-            <a:ext cx="4082796" cy="1188720"/>
-          </a:xfrm>
-          <a:prstGeom prst="rect">
-            <a:avLst/>
-          </a:prstGeom>
-          <a:noFill/>
-          <a:ln/>
-        </p:spPr>
-        <p:txBody>
-          <a:bodyPr wrap="square" lIns="0" tIns="0" rIns="0" bIns="0" rtlCol="0" anchor="t"/>
-          <a:lstStyle/>
-          <a:p>
-            <a:pPr indent="0" marL="0">
-              <a:lnSpc>
-                <a:spcPts val="2100"/>
-              </a:lnSpc>
-              <a:buNone/>
-            </a:pPr>
-            <a:r>
-              <a:rPr lang="en-US" sz="1550" dirty="0">
-                <a:solidFill>
-                  <a:srgbClr val="24313F"/>
-                </a:solidFill>
-                <a:latin typeface="Georgia" pitchFamily="34" charset="0"/>
-                <a:ea typeface="Georgia" pitchFamily="34" charset="-122"/>
-                <a:cs typeface="Georgia" pitchFamily="34" charset="-120"/>
-              </a:rPr>
-              <a:t>Whose shortcut did we borrow, and who pays for it?</a:t>
-            </a:r>
-            <a:endParaRPr lang="en-US" sz="1550" dirty="0"/>
-          </a:p>
-        </p:txBody>
-      </p:sp>
-      <p:sp>
-        <p:nvSpPr>
-          <p:cNvPr id="15" name="Text 13"/>
-          <p:cNvSpPr/>
-          <p:nvPr/>
-        </p:nvSpPr>
-        <p:spPr>
-          <a:xfrm>
-            <a:off x="6368796" y="4114800"/>
-            <a:ext cx="914400" cy="548640"/>
-          </a:xfrm>
-          <a:prstGeom prst="rect">
-            <a:avLst/>
-          </a:prstGeom>
-          <a:noFill/>
-          <a:ln/>
-        </p:spPr>
-        <p:txBody>
-          <a:bodyPr wrap="square" lIns="0" tIns="0" rIns="0" bIns="0" rtlCol="0" anchor="ctr"/>
-          <a:lstStyle/>
-          <a:p>
-            <a:pPr indent="0" marL="0">
-              <a:buNone/>
-            </a:pPr>
-            <a:r>
-              <a:rPr lang="en-US" sz="3000" dirty="0">
-                <a:solidFill>
-                  <a:srgbClr val="A3C1AD"/>
-                </a:solidFill>
-                <a:latin typeface="Georgia" pitchFamily="34" charset="0"/>
-                <a:ea typeface="Georgia" pitchFamily="34" charset="-122"/>
-                <a:cs typeface="Georgia" pitchFamily="34" charset="-120"/>
-              </a:rPr>
-              <a:t>04</a:t>
-            </a:r>
-            <a:endParaRPr lang="en-US" sz="3000" dirty="0"/>
-          </a:p>
-        </p:txBody>
-      </p:sp>
-      <p:sp>
-        <p:nvSpPr>
-          <p:cNvPr id="16" name="Text 14"/>
-          <p:cNvSpPr/>
-          <p:nvPr/>
-        </p:nvSpPr>
-        <p:spPr>
-          <a:xfrm>
-            <a:off x="7283196" y="4133088"/>
-            <a:ext cx="4082796" cy="457200"/>
-          </a:xfrm>
-          <a:prstGeom prst="rect">
-            <a:avLst/>
-          </a:prstGeom>
-          <a:noFill/>
-          <a:ln/>
-        </p:spPr>
-        <p:txBody>
-          <a:bodyPr wrap="square" lIns="0" tIns="0" rIns="0" bIns="0" rtlCol="0" anchor="ctr"/>
-          <a:lstStyle/>
-          <a:p>
-            <a:pPr indent="0" marL="0">
-              <a:buNone/>
-            </a:pPr>
-            <a:r>
-              <a:rPr lang="en-US" sz="2300" dirty="0">
-                <a:solidFill>
-                  <a:srgbClr val="4A6B5D"/>
-                </a:solidFill>
-                <a:latin typeface="Georgia" pitchFamily="34" charset="0"/>
-                <a:ea typeface="Georgia" pitchFamily="34" charset="-122"/>
-                <a:cs typeface="Georgia" pitchFamily="34" charset="-120"/>
-              </a:rPr>
-              <a:t>Absence</a:t>
-            </a:r>
-            <a:endParaRPr lang="en-US" sz="2300" dirty="0"/>
-          </a:p>
-        </p:txBody>
-      </p:sp>
-      <p:sp>
-        <p:nvSpPr>
-          <p:cNvPr id="17" name="Text 15"/>
-          <p:cNvSpPr/>
-          <p:nvPr/>
-        </p:nvSpPr>
-        <p:spPr>
-          <a:xfrm>
-            <a:off x="7283196" y="4663440"/>
-            <a:ext cx="4082796" cy="1188720"/>
-          </a:xfrm>
-          <a:prstGeom prst="rect">
-            <a:avLst/>
-          </a:prstGeom>
-          <a:noFill/>
-          <a:ln/>
-        </p:spPr>
-        <p:txBody>
-          <a:bodyPr wrap="square" lIns="0" tIns="0" rIns="0" bIns="0" rtlCol="0" anchor="t"/>
-          <a:lstStyle/>
-          <a:p>
-            <a:pPr indent="0" marL="0">
-              <a:lnSpc>
-                <a:spcPts val="2100"/>
-              </a:lnSpc>
-              <a:buNone/>
-            </a:pPr>
-            <a:r>
-              <a:rPr lang="en-US" sz="1550" dirty="0">
-                <a:solidFill>
-                  <a:srgbClr val="24313F"/>
-                </a:solidFill>
-                <a:latin typeface="Georgia" pitchFamily="34" charset="0"/>
-                <a:ea typeface="Georgia" pitchFamily="34" charset="-122"/>
-                <a:cs typeface="Georgia" pitchFamily="34" charset="-120"/>
-              </a:rPr>
-              <a:t>Who is missing from our product, by choice or by default?</a:t>
-            </a:r>
-            <a:endParaRPr lang="en-US" sz="1550" dirty="0"/>
-          </a:p>
-        </p:txBody>
-      </p:sp>
-      <p:sp>
-        <p:nvSpPr>
-          <p:cNvPr id="18" name="Text 16"/>
-          <p:cNvSpPr/>
-          <p:nvPr/>
-        </p:nvSpPr>
-        <p:spPr>
-          <a:xfrm>
-            <a:off x="822960" y="5989320"/>
-            <a:ext cx="10543032" cy="365760"/>
-          </a:xfrm>
-          <a:prstGeom prst="rect">
-            <a:avLst/>
-          </a:prstGeom>
-          <a:noFill/>
-          <a:ln/>
-        </p:spPr>
-        <p:txBody>
-          <a:bodyPr wrap="square" lIns="0" tIns="0" rIns="0" bIns="0" rtlCol="0" anchor="ctr"/>
-          <a:lstStyle/>
-          <a:p>
-            <a:pPr indent="0" marL="0">
-              <a:buNone/>
-            </a:pPr>
-            <a:r>
-              <a:rPr lang="en-US" sz="1150" i="1" dirty="0">
-                <a:solidFill>
-                  <a:srgbClr val="7A7F72"/>
-                </a:solidFill>
-                <a:latin typeface="Arial" pitchFamily="34" charset="0"/>
-                <a:ea typeface="Arial" pitchFamily="34" charset="-122"/>
-                <a:cs typeface="Arial" pitchFamily="34" charset="-120"/>
-              </a:rPr>
-              <a:t>A2 in Monday; the response cards become evidence Tuesday; LB3 posted on screening quality. The pickups are the homework.</a:t>
-            </a:r>
-            <a:endParaRPr lang="en-US" sz="1150" dirty="0"/>
-          </a:p>
-        </p:txBody>
-      </p:sp>
-      <p:sp>
-        <p:nvSpPr>
-          <p:cNvPr id="19" name="Shape 17"/>
-          <p:cNvSpPr/>
-          <p:nvPr/>
-        </p:nvSpPr>
-        <p:spPr>
-          <a:xfrm>
-            <a:off x="822960" y="6382512"/>
-            <a:ext cx="10543032" cy="0"/>
-          </a:xfrm>
-          <a:prstGeom prst="line">
-            <a:avLst/>
-          </a:prstGeom>
-          <a:noFill/>
+          <p:cNvPr id="5" name="Shape 3"/>
+          <p:cNvSpPr/>
+          <p:nvPr/>
+        </p:nvSpPr>
+        <p:spPr>
+          <a:xfrm>
+            <a:off x="822960" y="1097280"/>
+            <a:ext cx="5852160" cy="4206240"/>
+          </a:xfrm>
+          <a:prstGeom prst="rect">
+            <a:avLst/>
+          </a:prstGeom>
+          <a:solidFill>
+            <a:srgbClr val="FAF8F1"/>
+          </a:solidFill>
           <a:ln w="9525">
             <a:solidFill>
               <a:srgbClr val="D9D4C4"/>
@@ -3004,16 +2800,40 @@
           </a:ln>
         </p:spPr>
       </p:sp>
-      <p:sp>
-        <p:nvSpPr>
-          <p:cNvPr id="20" name="Text 18"/>
-          <p:cNvSpPr/>
-          <p:nvPr/>
-        </p:nvSpPr>
-        <p:spPr>
-          <a:xfrm>
-            <a:off x="822960" y="6419088"/>
-            <a:ext cx="7315200" cy="274320"/>
+      <p:pic>
+        <p:nvPicPr>
+          <p:cNvPr id="6" name="Image 0" descr="/Users/dogan/Documents/Vaults/Courses/wiki/classes/media-studies/decks/_build/img/lupin-vitrine.jpg">    </p:cNvPr>
+          <p:cNvPicPr>
+            <a:picLocks noChangeAspect="1"/>
+          </p:cNvPicPr>
+          <p:nvPr/>
+        </p:nvPicPr>
+        <p:blipFill>
+          <a:blip r:embed="rId1"/>
+          <a:stretch>
+            <a:fillRect/>
+          </a:stretch>
+        </p:blipFill>
+        <p:spPr>
+          <a:xfrm>
+            <a:off x="950976" y="1335024"/>
+            <a:ext cx="5596128" cy="3730752"/>
+          </a:xfrm>
+          <a:prstGeom prst="rect">
+            <a:avLst/>
+          </a:prstGeom>
+        </p:spPr>
+      </p:pic>
+      <p:sp>
+        <p:nvSpPr>
+          <p:cNvPr id="7" name="Text 4"/>
+          <p:cNvSpPr/>
+          <p:nvPr/>
+        </p:nvSpPr>
+        <p:spPr>
+          <a:xfrm>
+            <a:off x="822960" y="5349240"/>
+            <a:ext cx="5852160" cy="274320"/>
           </a:xfrm>
           <a:prstGeom prst="rect">
             <a:avLst/>
@@ -3025,11 +2845,11 @@
           <a:bodyPr wrap="square" lIns="0" tIns="0" rIns="0" bIns="0" rtlCol="0" anchor="ctr"/>
           <a:lstStyle/>
           <a:p>
-            <a:pPr indent="0" marL="0">
-              <a:buNone/>
-            </a:pPr>
-            <a:r>
-              <a:rPr lang="en-US" sz="900" spc="150" kern="0" dirty="0">
+            <a:pPr algn="ctr" indent="0" marL="0">
+              <a:buNone/>
+            </a:pPr>
+            <a:r>
+              <a:rPr lang="en-US" sz="1000" dirty="0">
                 <a:solidFill>
                   <a:srgbClr val="7A7F72"/>
                 </a:solidFill>
@@ -3037,46 +2857,264 @@
                 <a:ea typeface="Arial" pitchFamily="34" charset="-122"/>
                 <a:cs typeface="Arial" pitchFamily="34" charset="-120"/>
               </a:rPr>
-              <a:t>MEDIA STUDIES 9607 · SEMESTER I</a:t>
-            </a:r>
-            <a:endParaRPr lang="en-US" sz="900" dirty="0"/>
-          </a:p>
-        </p:txBody>
-      </p:sp>
-      <p:sp>
-        <p:nvSpPr>
-          <p:cNvPr id="21" name="Text 19"/>
-          <p:cNvSpPr/>
-          <p:nvPr/>
-        </p:nvSpPr>
-        <p:spPr>
-          <a:xfrm>
-            <a:off x="10268712" y="6355080"/>
-            <a:ext cx="1097280" cy="365760"/>
-          </a:xfrm>
-          <a:prstGeom prst="rect">
-            <a:avLst/>
-          </a:prstGeom>
-          <a:noFill/>
-          <a:ln/>
-        </p:spPr>
-        <p:txBody>
-          <a:bodyPr wrap="square" lIns="0" tIns="0" rIns="0" bIns="0" rtlCol="0" anchor="ctr"/>
-          <a:lstStyle/>
-          <a:p>
-            <a:pPr algn="r" indent="0" marL="0">
-              <a:buNone/>
-            </a:pPr>
-            <a:r>
-              <a:rPr lang="en-US" sz="1600" dirty="0">
-                <a:solidFill>
-                  <a:srgbClr val="A3C1AD"/>
+              <a:t>Lupin (Netflix, 2021): the cleaner the institution does not see</a:t>
+            </a:r>
+            <a:endParaRPr lang="en-US" sz="1000" dirty="0"/>
+          </a:p>
+        </p:txBody>
+      </p:sp>
+      <p:sp>
+        <p:nvSpPr>
+          <p:cNvPr id="8" name="Text 5"/>
+          <p:cNvSpPr/>
+          <p:nvPr/>
+        </p:nvSpPr>
+        <p:spPr>
+          <a:xfrm>
+            <a:off x="7086600" y="1280160"/>
+            <a:ext cx="4389120" cy="1371600"/>
+          </a:xfrm>
+          <a:prstGeom prst="rect">
+            <a:avLst/>
+          </a:prstGeom>
+          <a:noFill/>
+          <a:ln/>
+        </p:spPr>
+        <p:txBody>
+          <a:bodyPr wrap="square" lIns="0" tIns="0" rIns="0" bIns="0" rtlCol="0" anchor="t"/>
+          <a:lstStyle/>
+          <a:p>
+            <a:pPr indent="0" marL="0">
+              <a:lnSpc>
+                <a:spcPts val="3200"/>
+              </a:lnSpc>
+              <a:buNone/>
+            </a:pPr>
+            <a:r>
+              <a:rPr lang="en-US" sz="2600" dirty="0">
+                <a:solidFill>
+                  <a:srgbClr val="24313F"/>
                 </a:solidFill>
                 <a:latin typeface="Georgia" pitchFamily="34" charset="0"/>
                 <a:ea typeface="Georgia" pitchFamily="34" charset="-122"/>
                 <a:cs typeface="Georgia" pitchFamily="34" charset="-120"/>
               </a:rPr>
-              <a:t>04</a:t>
+              <a:t>What is never in the frame</a:t>
+            </a:r>
+            <a:endParaRPr lang="en-US" sz="2600" dirty="0"/>
+          </a:p>
+          <a:p>
+            <a:pPr indent="0" marL="0">
+              <a:lnSpc>
+                <a:spcPts val="3200"/>
+              </a:lnSpc>
+              <a:buNone/>
+            </a:pPr>
+            <a:r>
+              <a:rPr lang="en-US" sz="2600" dirty="0">
+                <a:solidFill>
+                  <a:srgbClr val="24313F"/>
+                </a:solidFill>
+                <a:latin typeface="Georgia" pitchFamily="34" charset="0"/>
+                <a:ea typeface="Georgia" pitchFamily="34" charset="-122"/>
+                <a:cs typeface="Georgia" pitchFamily="34" charset="-120"/>
+              </a:rPr>
+              <a:t>cannot be argued with</a:t>
+            </a:r>
+            <a:endParaRPr lang="en-US" sz="2600" dirty="0"/>
+          </a:p>
+        </p:txBody>
+      </p:sp>
+      <p:sp>
+        <p:nvSpPr>
+          <p:cNvPr id="9" name="Shape 6"/>
+          <p:cNvSpPr/>
+          <p:nvPr/>
+        </p:nvSpPr>
+        <p:spPr>
+          <a:xfrm>
+            <a:off x="7086600" y="2743200"/>
+            <a:ext cx="4297680" cy="0"/>
+          </a:xfrm>
+          <a:prstGeom prst="line">
+            <a:avLst/>
+          </a:prstGeom>
+          <a:noFill/>
+          <a:ln w="9525">
+            <a:solidFill>
+              <a:srgbClr val="D9D4C4"/>
+            </a:solidFill>
+            <a:prstDash val="solid"/>
+          </a:ln>
+        </p:spPr>
+      </p:sp>
+      <p:sp>
+        <p:nvSpPr>
+          <p:cNvPr id="10" name="Text 7"/>
+          <p:cNvSpPr/>
+          <p:nvPr/>
+        </p:nvSpPr>
+        <p:spPr>
+          <a:xfrm>
+            <a:off x="7086600" y="2926080"/>
+            <a:ext cx="4389120" cy="2926080"/>
+          </a:xfrm>
+          <a:prstGeom prst="rect">
+            <a:avLst/>
+          </a:prstGeom>
+          <a:noFill/>
+          <a:ln/>
+        </p:spPr>
+        <p:txBody>
+          <a:bodyPr wrap="square" lIns="0" tIns="0" rIns="0" bIns="0" rtlCol="0" anchor="t"/>
+          <a:lstStyle/>
+          <a:p>
+            <a:pPr indent="0" marL="0">
+              <a:lnSpc>
+                <a:spcPts val="2000"/>
+              </a:lnSpc>
+              <a:buNone/>
+            </a:pPr>
+            <a:r>
+              <a:rPr lang="en-US" sz="1450" dirty="0">
+                <a:solidFill>
+                  <a:srgbClr val="24313F"/>
+                </a:solidFill>
+                <a:latin typeface="Georgia" pitchFamily="34" charset="0"/>
+                <a:ea typeface="Georgia" pitchFamily="34" charset="-122"/>
+                <a:cs typeface="Georgia" pitchFamily="34" charset="-120"/>
+              </a:rPr>
+              <a:t>Who never appears cannot complain. Lupin builds its whole heist on the premise: the man in the worker's uniform is invisible to the museum because a class of person has been absented from attention.</a:t>
+            </a:r>
+            <a:endParaRPr lang="en-US" sz="1450" dirty="0"/>
+          </a:p>
+          <a:p>
+            <a:pPr indent="0" marL="0">
+              <a:lnSpc>
+                <a:spcPts val="2000"/>
+              </a:lnSpc>
+              <a:buNone/>
+            </a:pPr>
+            <a:endParaRPr lang="en-US" sz="1450" dirty="0"/>
+          </a:p>
+          <a:p>
+            <a:pPr indent="0" marL="0">
+              <a:lnSpc>
+                <a:spcPts val="2000"/>
+              </a:lnSpc>
+              <a:buNone/>
+            </a:pPr>
+            <a:r>
+              <a:rPr lang="en-US" sz="1450" dirty="0">
+                <a:solidFill>
+                  <a:srgbClr val="24313F"/>
+                </a:solidFill>
+                <a:latin typeface="Georgia" pitchFamily="34" charset="0"/>
+                <a:ea typeface="Georgia" pitchFamily="34" charset="-122"/>
+                <a:cs typeface="Georgia" pitchFamily="34" charset="-120"/>
+              </a:rPr>
+              <a:t>Run the inventory on your own product: who is missing, and did you choose that or default to it?</a:t>
+            </a:r>
+            <a:endParaRPr lang="en-US" sz="1450" dirty="0"/>
+          </a:p>
+        </p:txBody>
+      </p:sp>
+      <p:sp>
+        <p:nvSpPr>
+          <p:cNvPr id="11" name="Shape 8"/>
+          <p:cNvSpPr/>
+          <p:nvPr/>
+        </p:nvSpPr>
+        <p:spPr>
+          <a:xfrm>
+            <a:off x="822960" y="6382512"/>
+            <a:ext cx="10543032" cy="0"/>
+          </a:xfrm>
+          <a:prstGeom prst="line">
+            <a:avLst/>
+          </a:prstGeom>
+          <a:noFill/>
+          <a:ln w="9525">
+            <a:solidFill>
+              <a:srgbClr val="D9D4C4"/>
+            </a:solidFill>
+            <a:prstDash val="solid"/>
+          </a:ln>
+        </p:spPr>
+      </p:sp>
+      <p:sp>
+        <p:nvSpPr>
+          <p:cNvPr id="12" name="Text 9"/>
+          <p:cNvSpPr/>
+          <p:nvPr/>
+        </p:nvSpPr>
+        <p:spPr>
+          <a:xfrm>
+            <a:off x="822960" y="6419088"/>
+            <a:ext cx="7315200" cy="274320"/>
+          </a:xfrm>
+          <a:prstGeom prst="rect">
+            <a:avLst/>
+          </a:prstGeom>
+          <a:noFill/>
+          <a:ln/>
+        </p:spPr>
+        <p:txBody>
+          <a:bodyPr wrap="square" lIns="0" tIns="0" rIns="0" bIns="0" rtlCol="0" anchor="ctr"/>
+          <a:lstStyle/>
+          <a:p>
+            <a:pPr indent="0" marL="0">
+              <a:buNone/>
+            </a:pPr>
+            <a:r>
+              <a:rPr lang="en-US" sz="900" spc="150" kern="0" dirty="0">
+                <a:solidFill>
+                  <a:srgbClr val="7A7F72"/>
+                </a:solidFill>
+                <a:latin typeface="Arial" pitchFamily="34" charset="0"/>
+                <a:ea typeface="Arial" pitchFamily="34" charset="-122"/>
+                <a:cs typeface="Arial" pitchFamily="34" charset="-120"/>
+              </a:rPr>
+              <a:t>MEDIA STUDIES 9607 · SEMESTER I</a:t>
+            </a:r>
+            <a:endParaRPr lang="en-US" sz="900" dirty="0"/>
+          </a:p>
+        </p:txBody>
+      </p:sp>
+      <p:sp>
+        <p:nvSpPr>
+          <p:cNvPr id="13" name="Text 10"/>
+          <p:cNvSpPr/>
+          <p:nvPr/>
+        </p:nvSpPr>
+        <p:spPr>
+          <a:xfrm>
+            <a:off x="10268712" y="6355080"/>
+            <a:ext cx="1097280" cy="365760"/>
+          </a:xfrm>
+          <a:prstGeom prst="rect">
+            <a:avLst/>
+          </a:prstGeom>
+          <a:noFill/>
+          <a:ln/>
+        </p:spPr>
+        <p:txBody>
+          <a:bodyPr wrap="square" lIns="0" tIns="0" rIns="0" bIns="0" rtlCol="0" anchor="ctr"/>
+          <a:lstStyle/>
+          <a:p>
+            <a:pPr algn="r" indent="0" marL="0">
+              <a:buNone/>
+            </a:pPr>
+            <a:r>
+              <a:rPr lang="en-US" sz="1600" dirty="0">
+                <a:solidFill>
+                  <a:srgbClr val="A3C1AD"/>
+                </a:solidFill>
+                <a:latin typeface="Georgia" pitchFamily="34" charset="0"/>
+                <a:ea typeface="Georgia" pitchFamily="34" charset="-122"/>
+                <a:cs typeface="Georgia" pitchFamily="34" charset="-120"/>
+              </a:rPr>
+              <a:t>05</a:t>
             </a:r>
             <a:endParaRPr lang="en-US" sz="1600" dirty="0"/>
           </a:p>
@@ -3093,6 +3131,798 @@
 <file path=ppt/slides/slide12.xml><?xml version="1.0" encoding="utf-8"?>
 <p:sld xmlns:a="http://schemas.openxmlformats.org/drawingml/2006/main" xmlns:r="http://schemas.openxmlformats.org/officeDocument/2006/relationships" xmlns:p="http://schemas.openxmlformats.org/presentationml/2006/main">
   <p:cSld name="Slide 12">
+    <p:bg>
+      <p:bgPr>
+        <a:solidFill>
+          <a:srgbClr val="FAF8F1"/>
+        </a:solidFill>
+      </p:bgPr>
+    </p:bg>
+    <p:spTree>
+      <p:nvGrpSpPr>
+        <p:cNvPr id="1" name=""/>
+        <p:cNvGrpSpPr/>
+        <p:nvPr/>
+      </p:nvGrpSpPr>
+      <p:grpSpPr>
+        <a:xfrm>
+          <a:off x="0" y="0"/>
+          <a:ext cx="0" cy="0"/>
+          <a:chOff x="0" y="0"/>
+          <a:chExt cx="0" cy="0"/>
+        </a:xfrm>
+      </p:grpSpPr>
+      <p:sp>
+        <p:nvSpPr>
+          <p:cNvPr id="2" name="Text 0"/>
+          <p:cNvSpPr/>
+          <p:nvPr/>
+        </p:nvSpPr>
+        <p:spPr>
+          <a:xfrm>
+            <a:off x="822960" y="457200"/>
+            <a:ext cx="6400800" cy="274320"/>
+          </a:xfrm>
+          <a:prstGeom prst="rect">
+            <a:avLst/>
+          </a:prstGeom>
+          <a:noFill/>
+          <a:ln/>
+        </p:spPr>
+        <p:txBody>
+          <a:bodyPr wrap="square" lIns="0" tIns="0" rIns="0" bIns="0" rtlCol="0" anchor="ctr"/>
+          <a:lstStyle/>
+          <a:p>
+            <a:pPr algn="l" indent="0" marL="0">
+              <a:buNone/>
+            </a:pPr>
+            <a:r>
+              <a:rPr lang="en-US" sz="1100" b="1" spc="250" kern="0" dirty="0">
+                <a:solidFill>
+                  <a:srgbClr val="4A6B5D"/>
+                </a:solidFill>
+                <a:latin typeface="Arial" pitchFamily="34" charset="0"/>
+                <a:ea typeface="Arial" pitchFamily="34" charset="-122"/>
+                <a:cs typeface="Arial" pitchFamily="34" charset="-120"/>
+              </a:rPr>
+              <a:t>THE SELF-AUDIT</a:t>
+            </a:r>
+            <a:endParaRPr lang="en-US" sz="1100" dirty="0"/>
+          </a:p>
+        </p:txBody>
+      </p:sp>
+      <p:sp>
+        <p:nvSpPr>
+          <p:cNvPr id="3" name="Text 1"/>
+          <p:cNvSpPr/>
+          <p:nvPr/>
+        </p:nvSpPr>
+        <p:spPr>
+          <a:xfrm>
+            <a:off x="6793992" y="457200"/>
+            <a:ext cx="4572000" cy="274320"/>
+          </a:xfrm>
+          <a:prstGeom prst="rect">
+            <a:avLst/>
+          </a:prstGeom>
+          <a:noFill/>
+          <a:ln/>
+        </p:spPr>
+        <p:txBody>
+          <a:bodyPr wrap="square" lIns="0" tIns="0" rIns="0" bIns="0" rtlCol="0" anchor="ctr"/>
+          <a:lstStyle/>
+          <a:p>
+            <a:pPr algn="r" indent="0" marL="0">
+              <a:buNone/>
+            </a:pPr>
+            <a:r>
+              <a:rPr lang="en-US" sz="1100" b="1" spc="250" kern="0" dirty="0">
+                <a:solidFill>
+                  <a:srgbClr val="7A7F72"/>
+                </a:solidFill>
+                <a:latin typeface="Arial" pitchFamily="34" charset="0"/>
+                <a:ea typeface="Arial" pitchFamily="34" charset="-122"/>
+                <a:cs typeface="Arial" pitchFamily="34" charset="-120"/>
+              </a:rPr>
+              <a:t>THE WEEK'S FULL TOOLKIT, ON YOUR OWN CUT</a:t>
+            </a:r>
+            <a:endParaRPr lang="en-US" sz="1100" dirty="0"/>
+          </a:p>
+        </p:txBody>
+      </p:sp>
+      <p:sp>
+        <p:nvSpPr>
+          <p:cNvPr id="4" name="Shape 2"/>
+          <p:cNvSpPr/>
+          <p:nvPr/>
+        </p:nvSpPr>
+        <p:spPr>
+          <a:xfrm>
+            <a:off x="822960" y="786384"/>
+            <a:ext cx="10543032" cy="0"/>
+          </a:xfrm>
+          <a:prstGeom prst="line">
+            <a:avLst/>
+          </a:prstGeom>
+          <a:noFill/>
+          <a:ln w="9525">
+            <a:solidFill>
+              <a:srgbClr val="D9D4C4"/>
+            </a:solidFill>
+            <a:prstDash val="solid"/>
+          </a:ln>
+        </p:spPr>
+      </p:sp>
+      <p:sp>
+        <p:nvSpPr>
+          <p:cNvPr id="5" name="Text 3"/>
+          <p:cNvSpPr/>
+          <p:nvPr/>
+        </p:nvSpPr>
+        <p:spPr>
+          <a:xfrm>
+            <a:off x="822960" y="932688"/>
+            <a:ext cx="10543032" cy="640080"/>
+          </a:xfrm>
+          <a:prstGeom prst="rect">
+            <a:avLst/>
+          </a:prstGeom>
+          <a:noFill/>
+          <a:ln/>
+        </p:spPr>
+        <p:txBody>
+          <a:bodyPr wrap="square" lIns="0" tIns="0" rIns="0" bIns="0" rtlCol="0" anchor="ctr"/>
+          <a:lstStyle/>
+          <a:p>
+            <a:pPr indent="0" marL="0">
+              <a:buNone/>
+            </a:pPr>
+            <a:r>
+              <a:rPr lang="en-US" sz="3000" dirty="0">
+                <a:solidFill>
+                  <a:srgbClr val="24313F"/>
+                </a:solidFill>
+                <a:latin typeface="Georgia" pitchFamily="34" charset="0"/>
+                <a:ea typeface="Georgia" pitchFamily="34" charset="-122"/>
+                <a:cs typeface="Georgia" pitchFamily="34" charset="-120"/>
+              </a:rPr>
+              <a:t>Four questions of your own product</a:t>
+            </a:r>
+            <a:endParaRPr lang="en-US" sz="3000" dirty="0"/>
+          </a:p>
+        </p:txBody>
+      </p:sp>
+      <p:sp>
+        <p:nvSpPr>
+          <p:cNvPr id="6" name="Text 4"/>
+          <p:cNvSpPr/>
+          <p:nvPr/>
+        </p:nvSpPr>
+        <p:spPr>
+          <a:xfrm>
+            <a:off x="822960" y="1920240"/>
+            <a:ext cx="914400" cy="548640"/>
+          </a:xfrm>
+          <a:prstGeom prst="rect">
+            <a:avLst/>
+          </a:prstGeom>
+          <a:noFill/>
+          <a:ln/>
+        </p:spPr>
+        <p:txBody>
+          <a:bodyPr wrap="square" lIns="0" tIns="0" rIns="0" bIns="0" rtlCol="0" anchor="ctr"/>
+          <a:lstStyle/>
+          <a:p>
+            <a:pPr indent="0" marL="0">
+              <a:buNone/>
+            </a:pPr>
+            <a:r>
+              <a:rPr lang="en-US" sz="3000" dirty="0">
+                <a:solidFill>
+                  <a:srgbClr val="A3C1AD"/>
+                </a:solidFill>
+                <a:latin typeface="Georgia" pitchFamily="34" charset="0"/>
+                <a:ea typeface="Georgia" pitchFamily="34" charset="-122"/>
+                <a:cs typeface="Georgia" pitchFamily="34" charset="-120"/>
+              </a:rPr>
+              <a:t>01</a:t>
+            </a:r>
+            <a:endParaRPr lang="en-US" sz="3000" dirty="0"/>
+          </a:p>
+        </p:txBody>
+      </p:sp>
+      <p:sp>
+        <p:nvSpPr>
+          <p:cNvPr id="7" name="Text 5"/>
+          <p:cNvSpPr/>
+          <p:nvPr/>
+        </p:nvSpPr>
+        <p:spPr>
+          <a:xfrm>
+            <a:off x="1737360" y="1938528"/>
+            <a:ext cx="4082796" cy="457200"/>
+          </a:xfrm>
+          <a:prstGeom prst="rect">
+            <a:avLst/>
+          </a:prstGeom>
+          <a:noFill/>
+          <a:ln/>
+        </p:spPr>
+        <p:txBody>
+          <a:bodyPr wrap="square" lIns="0" tIns="0" rIns="0" bIns="0" rtlCol="0" anchor="ctr"/>
+          <a:lstStyle/>
+          <a:p>
+            <a:pPr indent="0" marL="0">
+              <a:buNone/>
+            </a:pPr>
+            <a:r>
+              <a:rPr lang="en-US" sz="2300" dirty="0">
+                <a:solidFill>
+                  <a:srgbClr val="4A6B5D"/>
+                </a:solidFill>
+                <a:latin typeface="Georgia" pitchFamily="34" charset="0"/>
+                <a:ea typeface="Georgia" pitchFamily="34" charset="-122"/>
+                <a:cs typeface="Georgia" pitchFamily="34" charset="-120"/>
+              </a:rPr>
+              <a:t>Construction</a:t>
+            </a:r>
+            <a:endParaRPr lang="en-US" sz="2300" dirty="0"/>
+          </a:p>
+        </p:txBody>
+      </p:sp>
+      <p:sp>
+        <p:nvSpPr>
+          <p:cNvPr id="8" name="Text 6"/>
+          <p:cNvSpPr/>
+          <p:nvPr/>
+        </p:nvSpPr>
+        <p:spPr>
+          <a:xfrm>
+            <a:off x="1737360" y="2468880"/>
+            <a:ext cx="4082796" cy="1188720"/>
+          </a:xfrm>
+          <a:prstGeom prst="rect">
+            <a:avLst/>
+          </a:prstGeom>
+          <a:noFill/>
+          <a:ln/>
+        </p:spPr>
+        <p:txBody>
+          <a:bodyPr wrap="square" lIns="0" tIns="0" rIns="0" bIns="0" rtlCol="0" anchor="t"/>
+          <a:lstStyle/>
+          <a:p>
+            <a:pPr indent="0" marL="0">
+              <a:lnSpc>
+                <a:spcPts val="2100"/>
+              </a:lnSpc>
+              <a:buNone/>
+            </a:pPr>
+            <a:r>
+              <a:rPr lang="en-US" sz="1550" dirty="0">
+                <a:solidFill>
+                  <a:srgbClr val="24313F"/>
+                </a:solidFill>
+                <a:latin typeface="Georgia" pitchFamily="34" charset="0"/>
+                <a:ea typeface="Georgia" pitchFamily="34" charset="-122"/>
+                <a:cs typeface="Georgia" pitchFamily="34" charset="-120"/>
+              </a:rPr>
+              <a:t>What did we select and combine, and what did that leave out?</a:t>
+            </a:r>
+            <a:endParaRPr lang="en-US" sz="1550" dirty="0"/>
+          </a:p>
+        </p:txBody>
+      </p:sp>
+      <p:sp>
+        <p:nvSpPr>
+          <p:cNvPr id="9" name="Text 7"/>
+          <p:cNvSpPr/>
+          <p:nvPr/>
+        </p:nvSpPr>
+        <p:spPr>
+          <a:xfrm>
+            <a:off x="6368796" y="1920240"/>
+            <a:ext cx="914400" cy="548640"/>
+          </a:xfrm>
+          <a:prstGeom prst="rect">
+            <a:avLst/>
+          </a:prstGeom>
+          <a:noFill/>
+          <a:ln/>
+        </p:spPr>
+        <p:txBody>
+          <a:bodyPr wrap="square" lIns="0" tIns="0" rIns="0" bIns="0" rtlCol="0" anchor="ctr"/>
+          <a:lstStyle/>
+          <a:p>
+            <a:pPr indent="0" marL="0">
+              <a:buNone/>
+            </a:pPr>
+            <a:r>
+              <a:rPr lang="en-US" sz="3000" dirty="0">
+                <a:solidFill>
+                  <a:srgbClr val="A3C1AD"/>
+                </a:solidFill>
+                <a:latin typeface="Georgia" pitchFamily="34" charset="0"/>
+                <a:ea typeface="Georgia" pitchFamily="34" charset="-122"/>
+                <a:cs typeface="Georgia" pitchFamily="34" charset="-120"/>
+              </a:rPr>
+              <a:t>02</a:t>
+            </a:r>
+            <a:endParaRPr lang="en-US" sz="3000" dirty="0"/>
+          </a:p>
+        </p:txBody>
+      </p:sp>
+      <p:sp>
+        <p:nvSpPr>
+          <p:cNvPr id="10" name="Text 8"/>
+          <p:cNvSpPr/>
+          <p:nvPr/>
+        </p:nvSpPr>
+        <p:spPr>
+          <a:xfrm>
+            <a:off x="7283196" y="1938528"/>
+            <a:ext cx="4082796" cy="457200"/>
+          </a:xfrm>
+          <a:prstGeom prst="rect">
+            <a:avLst/>
+          </a:prstGeom>
+          <a:noFill/>
+          <a:ln/>
+        </p:spPr>
+        <p:txBody>
+          <a:bodyPr wrap="square" lIns="0" tIns="0" rIns="0" bIns="0" rtlCol="0" anchor="ctr"/>
+          <a:lstStyle/>
+          <a:p>
+            <a:pPr indent="0" marL="0">
+              <a:buNone/>
+            </a:pPr>
+            <a:r>
+              <a:rPr lang="en-US" sz="2300" dirty="0">
+                <a:solidFill>
+                  <a:srgbClr val="4A6B5D"/>
+                </a:solidFill>
+                <a:latin typeface="Georgia" pitchFamily="34" charset="0"/>
+                <a:ea typeface="Georgia" pitchFamily="34" charset="-122"/>
+                <a:cs typeface="Georgia" pitchFamily="34" charset="-120"/>
+              </a:rPr>
+              <a:t>Positions</a:t>
+            </a:r>
+            <a:endParaRPr lang="en-US" sz="2300" dirty="0"/>
+          </a:p>
+        </p:txBody>
+      </p:sp>
+      <p:sp>
+        <p:nvSpPr>
+          <p:cNvPr id="11" name="Text 9"/>
+          <p:cNvSpPr/>
+          <p:nvPr/>
+        </p:nvSpPr>
+        <p:spPr>
+          <a:xfrm>
+            <a:off x="7283196" y="2468880"/>
+            <a:ext cx="4082796" cy="1188720"/>
+          </a:xfrm>
+          <a:prstGeom prst="rect">
+            <a:avLst/>
+          </a:prstGeom>
+          <a:noFill/>
+          <a:ln/>
+        </p:spPr>
+        <p:txBody>
+          <a:bodyPr wrap="square" lIns="0" tIns="0" rIns="0" bIns="0" rtlCol="0" anchor="t"/>
+          <a:lstStyle/>
+          <a:p>
+            <a:pPr indent="0" marL="0">
+              <a:lnSpc>
+                <a:spcPts val="2100"/>
+              </a:lnSpc>
+              <a:buNone/>
+            </a:pPr>
+            <a:r>
+              <a:rPr lang="en-US" sz="1550" dirty="0">
+                <a:solidFill>
+                  <a:srgbClr val="24313F"/>
+                </a:solidFill>
+                <a:latin typeface="Georgia" pitchFamily="34" charset="0"/>
+                <a:ea typeface="Georgia" pitchFamily="34" charset="-122"/>
+                <a:cs typeface="Georgia" pitchFamily="34" charset="-120"/>
+              </a:rPr>
+              <a:t>What reading did we assume our audience would take?</a:t>
+            </a:r>
+            <a:endParaRPr lang="en-US" sz="1550" dirty="0"/>
+          </a:p>
+        </p:txBody>
+      </p:sp>
+      <p:sp>
+        <p:nvSpPr>
+          <p:cNvPr id="12" name="Text 10"/>
+          <p:cNvSpPr/>
+          <p:nvPr/>
+        </p:nvSpPr>
+        <p:spPr>
+          <a:xfrm>
+            <a:off x="822960" y="4114800"/>
+            <a:ext cx="914400" cy="548640"/>
+          </a:xfrm>
+          <a:prstGeom prst="rect">
+            <a:avLst/>
+          </a:prstGeom>
+          <a:noFill/>
+          <a:ln/>
+        </p:spPr>
+        <p:txBody>
+          <a:bodyPr wrap="square" lIns="0" tIns="0" rIns="0" bIns="0" rtlCol="0" anchor="ctr"/>
+          <a:lstStyle/>
+          <a:p>
+            <a:pPr indent="0" marL="0">
+              <a:buNone/>
+            </a:pPr>
+            <a:r>
+              <a:rPr lang="en-US" sz="3000" dirty="0">
+                <a:solidFill>
+                  <a:srgbClr val="A3C1AD"/>
+                </a:solidFill>
+                <a:latin typeface="Georgia" pitchFamily="34" charset="0"/>
+                <a:ea typeface="Georgia" pitchFamily="34" charset="-122"/>
+                <a:cs typeface="Georgia" pitchFamily="34" charset="-120"/>
+              </a:rPr>
+              <a:t>03</a:t>
+            </a:r>
+            <a:endParaRPr lang="en-US" sz="3000" dirty="0"/>
+          </a:p>
+        </p:txBody>
+      </p:sp>
+      <p:sp>
+        <p:nvSpPr>
+          <p:cNvPr id="13" name="Text 11"/>
+          <p:cNvSpPr/>
+          <p:nvPr/>
+        </p:nvSpPr>
+        <p:spPr>
+          <a:xfrm>
+            <a:off x="1737360" y="4133088"/>
+            <a:ext cx="4082796" cy="457200"/>
+          </a:xfrm>
+          <a:prstGeom prst="rect">
+            <a:avLst/>
+          </a:prstGeom>
+          <a:noFill/>
+          <a:ln/>
+        </p:spPr>
+        <p:txBody>
+          <a:bodyPr wrap="square" lIns="0" tIns="0" rIns="0" bIns="0" rtlCol="0" anchor="ctr"/>
+          <a:lstStyle/>
+          <a:p>
+            <a:pPr indent="0" marL="0">
+              <a:buNone/>
+            </a:pPr>
+            <a:r>
+              <a:rPr lang="en-US" sz="2300" dirty="0">
+                <a:solidFill>
+                  <a:srgbClr val="4A6B5D"/>
+                </a:solidFill>
+                <a:latin typeface="Georgia" pitchFamily="34" charset="0"/>
+                <a:ea typeface="Georgia" pitchFamily="34" charset="-122"/>
+                <a:cs typeface="Georgia" pitchFamily="34" charset="-120"/>
+              </a:rPr>
+              <a:t>Power</a:t>
+            </a:r>
+            <a:endParaRPr lang="en-US" sz="2300" dirty="0"/>
+          </a:p>
+        </p:txBody>
+      </p:sp>
+      <p:sp>
+        <p:nvSpPr>
+          <p:cNvPr id="14" name="Text 12"/>
+          <p:cNvSpPr/>
+          <p:nvPr/>
+        </p:nvSpPr>
+        <p:spPr>
+          <a:xfrm>
+            <a:off x="1737360" y="4663440"/>
+            <a:ext cx="4082796" cy="1188720"/>
+          </a:xfrm>
+          <a:prstGeom prst="rect">
+            <a:avLst/>
+          </a:prstGeom>
+          <a:noFill/>
+          <a:ln/>
+        </p:spPr>
+        <p:txBody>
+          <a:bodyPr wrap="square" lIns="0" tIns="0" rIns="0" bIns="0" rtlCol="0" anchor="t"/>
+          <a:lstStyle/>
+          <a:p>
+            <a:pPr indent="0" marL="0">
+              <a:lnSpc>
+                <a:spcPts val="2100"/>
+              </a:lnSpc>
+              <a:buNone/>
+            </a:pPr>
+            <a:r>
+              <a:rPr lang="en-US" sz="1550" dirty="0">
+                <a:solidFill>
+                  <a:srgbClr val="24313F"/>
+                </a:solidFill>
+                <a:latin typeface="Georgia" pitchFamily="34" charset="0"/>
+                <a:ea typeface="Georgia" pitchFamily="34" charset="-122"/>
+                <a:cs typeface="Georgia" pitchFamily="34" charset="-120"/>
+              </a:rPr>
+              <a:t>Whose shortcut did we borrow, and who pays for it?</a:t>
+            </a:r>
+            <a:endParaRPr lang="en-US" sz="1550" dirty="0"/>
+          </a:p>
+        </p:txBody>
+      </p:sp>
+      <p:sp>
+        <p:nvSpPr>
+          <p:cNvPr id="15" name="Text 13"/>
+          <p:cNvSpPr/>
+          <p:nvPr/>
+        </p:nvSpPr>
+        <p:spPr>
+          <a:xfrm>
+            <a:off x="6368796" y="4114800"/>
+            <a:ext cx="914400" cy="548640"/>
+          </a:xfrm>
+          <a:prstGeom prst="rect">
+            <a:avLst/>
+          </a:prstGeom>
+          <a:noFill/>
+          <a:ln/>
+        </p:spPr>
+        <p:txBody>
+          <a:bodyPr wrap="square" lIns="0" tIns="0" rIns="0" bIns="0" rtlCol="0" anchor="ctr"/>
+          <a:lstStyle/>
+          <a:p>
+            <a:pPr indent="0" marL="0">
+              <a:buNone/>
+            </a:pPr>
+            <a:r>
+              <a:rPr lang="en-US" sz="3000" dirty="0">
+                <a:solidFill>
+                  <a:srgbClr val="A3C1AD"/>
+                </a:solidFill>
+                <a:latin typeface="Georgia" pitchFamily="34" charset="0"/>
+                <a:ea typeface="Georgia" pitchFamily="34" charset="-122"/>
+                <a:cs typeface="Georgia" pitchFamily="34" charset="-120"/>
+              </a:rPr>
+              <a:t>04</a:t>
+            </a:r>
+            <a:endParaRPr lang="en-US" sz="3000" dirty="0"/>
+          </a:p>
+        </p:txBody>
+      </p:sp>
+      <p:sp>
+        <p:nvSpPr>
+          <p:cNvPr id="16" name="Text 14"/>
+          <p:cNvSpPr/>
+          <p:nvPr/>
+        </p:nvSpPr>
+        <p:spPr>
+          <a:xfrm>
+            <a:off x="7283196" y="4133088"/>
+            <a:ext cx="4082796" cy="457200"/>
+          </a:xfrm>
+          <a:prstGeom prst="rect">
+            <a:avLst/>
+          </a:prstGeom>
+          <a:noFill/>
+          <a:ln/>
+        </p:spPr>
+        <p:txBody>
+          <a:bodyPr wrap="square" lIns="0" tIns="0" rIns="0" bIns="0" rtlCol="0" anchor="ctr"/>
+          <a:lstStyle/>
+          <a:p>
+            <a:pPr indent="0" marL="0">
+              <a:buNone/>
+            </a:pPr>
+            <a:r>
+              <a:rPr lang="en-US" sz="2300" dirty="0">
+                <a:solidFill>
+                  <a:srgbClr val="4A6B5D"/>
+                </a:solidFill>
+                <a:latin typeface="Georgia" pitchFamily="34" charset="0"/>
+                <a:ea typeface="Georgia" pitchFamily="34" charset="-122"/>
+                <a:cs typeface="Georgia" pitchFamily="34" charset="-120"/>
+              </a:rPr>
+              <a:t>Absence</a:t>
+            </a:r>
+            <a:endParaRPr lang="en-US" sz="2300" dirty="0"/>
+          </a:p>
+        </p:txBody>
+      </p:sp>
+      <p:sp>
+        <p:nvSpPr>
+          <p:cNvPr id="17" name="Text 15"/>
+          <p:cNvSpPr/>
+          <p:nvPr/>
+        </p:nvSpPr>
+        <p:spPr>
+          <a:xfrm>
+            <a:off x="7283196" y="4663440"/>
+            <a:ext cx="4082796" cy="1188720"/>
+          </a:xfrm>
+          <a:prstGeom prst="rect">
+            <a:avLst/>
+          </a:prstGeom>
+          <a:noFill/>
+          <a:ln/>
+        </p:spPr>
+        <p:txBody>
+          <a:bodyPr wrap="square" lIns="0" tIns="0" rIns="0" bIns="0" rtlCol="0" anchor="t"/>
+          <a:lstStyle/>
+          <a:p>
+            <a:pPr indent="0" marL="0">
+              <a:lnSpc>
+                <a:spcPts val="2100"/>
+              </a:lnSpc>
+              <a:buNone/>
+            </a:pPr>
+            <a:r>
+              <a:rPr lang="en-US" sz="1550" dirty="0">
+                <a:solidFill>
+                  <a:srgbClr val="24313F"/>
+                </a:solidFill>
+                <a:latin typeface="Georgia" pitchFamily="34" charset="0"/>
+                <a:ea typeface="Georgia" pitchFamily="34" charset="-122"/>
+                <a:cs typeface="Georgia" pitchFamily="34" charset="-120"/>
+              </a:rPr>
+              <a:t>Who is missing from our product, by choice or by default?</a:t>
+            </a:r>
+            <a:endParaRPr lang="en-US" sz="1550" dirty="0"/>
+          </a:p>
+        </p:txBody>
+      </p:sp>
+      <p:sp>
+        <p:nvSpPr>
+          <p:cNvPr id="18" name="Text 16"/>
+          <p:cNvSpPr/>
+          <p:nvPr/>
+        </p:nvSpPr>
+        <p:spPr>
+          <a:xfrm>
+            <a:off x="822960" y="5989320"/>
+            <a:ext cx="10543032" cy="365760"/>
+          </a:xfrm>
+          <a:prstGeom prst="rect">
+            <a:avLst/>
+          </a:prstGeom>
+          <a:noFill/>
+          <a:ln/>
+        </p:spPr>
+        <p:txBody>
+          <a:bodyPr wrap="square" lIns="0" tIns="0" rIns="0" bIns="0" rtlCol="0" anchor="ctr"/>
+          <a:lstStyle/>
+          <a:p>
+            <a:pPr indent="0" marL="0">
+              <a:buNone/>
+            </a:pPr>
+            <a:r>
+              <a:rPr lang="en-US" sz="1150" i="1" dirty="0">
+                <a:solidFill>
+                  <a:srgbClr val="7A7F72"/>
+                </a:solidFill>
+                <a:latin typeface="Arial" pitchFamily="34" charset="0"/>
+                <a:ea typeface="Arial" pitchFamily="34" charset="-122"/>
+                <a:cs typeface="Arial" pitchFamily="34" charset="-120"/>
+              </a:rPr>
+              <a:t>A2 in Monday; the response cards become evidence Tuesday; LB3 posted on screening quality. The pickups are the homework.</a:t>
+            </a:r>
+            <a:endParaRPr lang="en-US" sz="1150" dirty="0"/>
+          </a:p>
+        </p:txBody>
+      </p:sp>
+      <p:sp>
+        <p:nvSpPr>
+          <p:cNvPr id="19" name="Shape 17"/>
+          <p:cNvSpPr/>
+          <p:nvPr/>
+        </p:nvSpPr>
+        <p:spPr>
+          <a:xfrm>
+            <a:off x="822960" y="6382512"/>
+            <a:ext cx="10543032" cy="0"/>
+          </a:xfrm>
+          <a:prstGeom prst="line">
+            <a:avLst/>
+          </a:prstGeom>
+          <a:noFill/>
+          <a:ln w="9525">
+            <a:solidFill>
+              <a:srgbClr val="D9D4C4"/>
+            </a:solidFill>
+            <a:prstDash val="solid"/>
+          </a:ln>
+        </p:spPr>
+      </p:sp>
+      <p:sp>
+        <p:nvSpPr>
+          <p:cNvPr id="20" name="Text 18"/>
+          <p:cNvSpPr/>
+          <p:nvPr/>
+        </p:nvSpPr>
+        <p:spPr>
+          <a:xfrm>
+            <a:off x="822960" y="6419088"/>
+            <a:ext cx="7315200" cy="274320"/>
+          </a:xfrm>
+          <a:prstGeom prst="rect">
+            <a:avLst/>
+          </a:prstGeom>
+          <a:noFill/>
+          <a:ln/>
+        </p:spPr>
+        <p:txBody>
+          <a:bodyPr wrap="square" lIns="0" tIns="0" rIns="0" bIns="0" rtlCol="0" anchor="ctr"/>
+          <a:lstStyle/>
+          <a:p>
+            <a:pPr indent="0" marL="0">
+              <a:buNone/>
+            </a:pPr>
+            <a:r>
+              <a:rPr lang="en-US" sz="900" spc="150" kern="0" dirty="0">
+                <a:solidFill>
+                  <a:srgbClr val="7A7F72"/>
+                </a:solidFill>
+                <a:latin typeface="Arial" pitchFamily="34" charset="0"/>
+                <a:ea typeface="Arial" pitchFamily="34" charset="-122"/>
+                <a:cs typeface="Arial" pitchFamily="34" charset="-120"/>
+              </a:rPr>
+              <a:t>MEDIA STUDIES 9607 · SEMESTER I</a:t>
+            </a:r>
+            <a:endParaRPr lang="en-US" sz="900" dirty="0"/>
+          </a:p>
+        </p:txBody>
+      </p:sp>
+      <p:sp>
+        <p:nvSpPr>
+          <p:cNvPr id="21" name="Text 19"/>
+          <p:cNvSpPr/>
+          <p:nvPr/>
+        </p:nvSpPr>
+        <p:spPr>
+          <a:xfrm>
+            <a:off x="10268712" y="6355080"/>
+            <a:ext cx="1097280" cy="365760"/>
+          </a:xfrm>
+          <a:prstGeom prst="rect">
+            <a:avLst/>
+          </a:prstGeom>
+          <a:noFill/>
+          <a:ln/>
+        </p:spPr>
+        <p:txBody>
+          <a:bodyPr wrap="square" lIns="0" tIns="0" rIns="0" bIns="0" rtlCol="0" anchor="ctr"/>
+          <a:lstStyle/>
+          <a:p>
+            <a:pPr algn="r" indent="0" marL="0">
+              <a:buNone/>
+            </a:pPr>
+            <a:r>
+              <a:rPr lang="en-US" sz="1600" dirty="0">
+                <a:solidFill>
+                  <a:srgbClr val="A3C1AD"/>
+                </a:solidFill>
+                <a:latin typeface="Georgia" pitchFamily="34" charset="0"/>
+                <a:ea typeface="Georgia" pitchFamily="34" charset="-122"/>
+                <a:cs typeface="Georgia" pitchFamily="34" charset="-120"/>
+              </a:rPr>
+              <a:t>06</a:t>
+            </a:r>
+            <a:endParaRPr lang="en-US" sz="1600" dirty="0"/>
+          </a:p>
+        </p:txBody>
+      </p:sp>
+    </p:spTree>
+  </p:cSld>
+  <p:clrMapOvr>
+    <a:masterClrMapping/>
+  </p:clrMapOvr>
+</p:sld>
+</file>
+
+<file path=ppt/slides/slide13.xml><?xml version="1.0" encoding="utf-8"?>
+<p:sld xmlns:a="http://schemas.openxmlformats.org/drawingml/2006/main" xmlns:r="http://schemas.openxmlformats.org/officeDocument/2006/relationships" xmlns:p="http://schemas.openxmlformats.org/presentationml/2006/main">
+  <p:cSld name="Slide 13">
     <p:bg>
       <p:bgPr>
         <a:solidFill>
@@ -3349,7 +4179,7 @@
                 <a:ea typeface="Georgia" pitchFamily="34" charset="-122"/>
                 <a:cs typeface="Georgia" pitchFamily="34" charset="-120"/>
               </a:rPr>
-              <a:t>05</a:t>
+              <a:t>07</a:t>
             </a:r>
             <a:endParaRPr lang="en-US" sz="1600" dirty="0"/>
           </a:p>
@@ -5653,7 +6483,7 @@
                 <a:ea typeface="Arial" pitchFamily="34" charset="-122"/>
                 <a:cs typeface="Arial" pitchFamily="34" charset="-120"/>
               </a:rPr>
-              <a:t>STEREOTYPING AS POWER</a:t>
+              <a:t>NATION BRANDING</a:t>
             </a:r>
             <a:endParaRPr lang="en-US" sz="1100" dirty="0"/>
           </a:p>
@@ -5692,7 +6522,7 @@
                 <a:ea typeface="Arial" pitchFamily="34" charset="-122"/>
                 <a:cs typeface="Arial" pitchFamily="34" charset="-120"/>
               </a:rPr>
-              <a:t>WHO BENEFITS, WHO PAYS</a:t>
+              <a:t>DOWNTON'S BRITAIN, WORKED IN FULL</a:t>
             </a:r>
             <a:endParaRPr lang="en-US" sz="1100" dirty="0"/>
           </a:p>
@@ -5723,14 +6553,63 @@
       </p:sp>
       <p:sp>
         <p:nvSpPr>
-          <p:cNvPr id="5" name="Text 3"/>
-          <p:cNvSpPr/>
-          <p:nvPr/>
-        </p:nvSpPr>
-        <p:spPr>
-          <a:xfrm>
-            <a:off x="822960" y="1280160"/>
-            <a:ext cx="10543032" cy="914400"/>
+          <p:cNvPr id="5" name="Shape 3"/>
+          <p:cNvSpPr/>
+          <p:nvPr/>
+        </p:nvSpPr>
+        <p:spPr>
+          <a:xfrm>
+            <a:off x="822960" y="1143000"/>
+            <a:ext cx="2361438" cy="2377440"/>
+          </a:xfrm>
+          <a:prstGeom prst="rect">
+            <a:avLst/>
+          </a:prstGeom>
+          <a:solidFill>
+            <a:srgbClr val="FAF8F1"/>
+          </a:solidFill>
+          <a:ln w="9525">
+            <a:solidFill>
+              <a:srgbClr val="D9D4C4"/>
+            </a:solidFill>
+            <a:prstDash val="solid"/>
+          </a:ln>
+        </p:spPr>
+      </p:sp>
+      <p:pic>
+        <p:nvPicPr>
+          <p:cNvPr id="6" name="Image 0" descr="/Users/dogan/Documents/Vaults/Courses/wiki/classes/media-studies/decks/_build/img/downton-house.jpg">    </p:cNvPr>
+          <p:cNvPicPr>
+            <a:picLocks noChangeAspect="1"/>
+          </p:cNvPicPr>
+          <p:nvPr/>
+        </p:nvPicPr>
+        <p:blipFill>
+          <a:blip r:embed="rId1"/>
+          <a:stretch>
+            <a:fillRect/>
+          </a:stretch>
+        </p:blipFill>
+        <p:spPr>
+          <a:xfrm>
+            <a:off x="992695" y="1216152"/>
+            <a:ext cx="2021967" cy="2231136"/>
+          </a:xfrm>
+          <a:prstGeom prst="rect">
+            <a:avLst/>
+          </a:prstGeom>
+        </p:spPr>
+      </p:pic>
+      <p:sp>
+        <p:nvSpPr>
+          <p:cNvPr id="7" name="Text 4"/>
+          <p:cNvSpPr/>
+          <p:nvPr/>
+        </p:nvSpPr>
+        <p:spPr>
+          <a:xfrm>
+            <a:off x="822960" y="3566160"/>
+            <a:ext cx="2361438" cy="320040"/>
           </a:xfrm>
           <a:prstGeom prst="rect">
             <a:avLst/>
@@ -5742,33 +6621,504 @@
           <a:bodyPr wrap="square" lIns="0" tIns="0" rIns="0" bIns="0" rtlCol="0" anchor="ctr"/>
           <a:lstStyle/>
           <a:p>
-            <a:pPr indent="0" marL="0">
-              <a:buNone/>
-            </a:pPr>
-            <a:r>
-              <a:rPr lang="en-US" sz="3800" dirty="0">
-                <a:solidFill>
-                  <a:srgbClr val="24313F"/>
+            <a:pPr algn="ctr" indent="0" marL="0">
+              <a:buNone/>
+            </a:pPr>
+            <a:r>
+              <a:rPr lang="en-US" sz="1550" dirty="0">
+                <a:solidFill>
+                  <a:srgbClr val="4A6B5D"/>
                 </a:solidFill>
                 <a:latin typeface="Georgia" pitchFamily="34" charset="0"/>
                 <a:ea typeface="Georgia" pitchFamily="34" charset="-122"/>
                 <a:cs typeface="Georgia" pitchFamily="34" charset="-120"/>
               </a:rPr>
-              <a:t>A shortcut with a beneficiary</a:t>
-            </a:r>
-            <a:endParaRPr lang="en-US" sz="3800" dirty="0"/>
-          </a:p>
-        </p:txBody>
-      </p:sp>
-      <p:sp>
-        <p:nvSpPr>
-          <p:cNvPr id="6" name="Shape 4"/>
-          <p:cNvSpPr/>
-          <p:nvPr/>
-        </p:nvSpPr>
-        <p:spPr>
-          <a:xfrm>
-            <a:off x="822960" y="2514600"/>
+              <a:t>The house</a:t>
+            </a:r>
+            <a:endParaRPr lang="en-US" sz="1550" dirty="0"/>
+          </a:p>
+        </p:txBody>
+      </p:sp>
+      <p:sp>
+        <p:nvSpPr>
+          <p:cNvPr id="8" name="Text 5"/>
+          <p:cNvSpPr/>
+          <p:nvPr/>
+        </p:nvSpPr>
+        <p:spPr>
+          <a:xfrm>
+            <a:off x="822960" y="3886200"/>
+            <a:ext cx="2361438" cy="548640"/>
+          </a:xfrm>
+          <a:prstGeom prst="rect">
+            <a:avLst/>
+          </a:prstGeom>
+          <a:noFill/>
+          <a:ln/>
+        </p:spPr>
+        <p:txBody>
+          <a:bodyPr wrap="square" lIns="0" tIns="0" rIns="0" bIns="0" rtlCol="0" anchor="t"/>
+          <a:lstStyle/>
+          <a:p>
+            <a:pPr algn="ctr" indent="0" marL="0">
+              <a:lnSpc>
+                <a:spcPts val="1300"/>
+              </a:lnSpc>
+              <a:buNone/>
+            </a:pPr>
+            <a:r>
+              <a:rPr lang="en-US" sz="1050" i="1" dirty="0">
+                <a:solidFill>
+                  <a:srgbClr val="7A7F72"/>
+                </a:solidFill>
+                <a:latin typeface="Arial" pitchFamily="34" charset="0"/>
+                <a:ea typeface="Arial" pitchFamily="34" charset="-122"/>
+                <a:cs typeface="Arial" pitchFamily="34" charset="-120"/>
+              </a:rPr>
+              <a:t>heritage as the establishing shot</a:t>
+            </a:r>
+            <a:endParaRPr lang="en-US" sz="1050" dirty="0"/>
+          </a:p>
+        </p:txBody>
+      </p:sp>
+      <p:sp>
+        <p:nvSpPr>
+          <p:cNvPr id="9" name="Shape 6"/>
+          <p:cNvSpPr/>
+          <p:nvPr/>
+        </p:nvSpPr>
+        <p:spPr>
+          <a:xfrm>
+            <a:off x="3550158" y="1143000"/>
+            <a:ext cx="2361438" cy="2377440"/>
+          </a:xfrm>
+          <a:prstGeom prst="rect">
+            <a:avLst/>
+          </a:prstGeom>
+          <a:solidFill>
+            <a:srgbClr val="FAF8F1"/>
+          </a:solidFill>
+          <a:ln w="9525">
+            <a:solidFill>
+              <a:srgbClr val="D9D4C4"/>
+            </a:solidFill>
+            <a:prstDash val="solid"/>
+          </a:ln>
+        </p:spPr>
+      </p:sp>
+      <p:pic>
+        <p:nvPicPr>
+          <p:cNvPr id="10" name="Image 1" descr="/Users/dogan/Documents/Vaults/Courses/wiki/classes/media-studies/decks/_build/img/downton-dining.jpg">    </p:cNvPr>
+          <p:cNvPicPr>
+            <a:picLocks noChangeAspect="1"/>
+          </p:cNvPicPr>
+          <p:nvPr/>
+        </p:nvPicPr>
+        <p:blipFill>
+          <a:blip r:embed="rId2"/>
+          <a:stretch>
+            <a:fillRect/>
+          </a:stretch>
+        </p:blipFill>
+        <p:spPr>
+          <a:xfrm>
+            <a:off x="3623310" y="1771675"/>
+            <a:ext cx="2215134" cy="1120090"/>
+          </a:xfrm>
+          <a:prstGeom prst="rect">
+            <a:avLst/>
+          </a:prstGeom>
+        </p:spPr>
+      </p:pic>
+      <p:sp>
+        <p:nvSpPr>
+          <p:cNvPr id="11" name="Text 7"/>
+          <p:cNvSpPr/>
+          <p:nvPr/>
+        </p:nvSpPr>
+        <p:spPr>
+          <a:xfrm>
+            <a:off x="3550158" y="3566160"/>
+            <a:ext cx="2361438" cy="320040"/>
+          </a:xfrm>
+          <a:prstGeom prst="rect">
+            <a:avLst/>
+          </a:prstGeom>
+          <a:noFill/>
+          <a:ln/>
+        </p:spPr>
+        <p:txBody>
+          <a:bodyPr wrap="square" lIns="0" tIns="0" rIns="0" bIns="0" rtlCol="0" anchor="ctr"/>
+          <a:lstStyle/>
+          <a:p>
+            <a:pPr algn="ctr" indent="0" marL="0">
+              <a:buNone/>
+            </a:pPr>
+            <a:r>
+              <a:rPr lang="en-US" sz="1550" dirty="0">
+                <a:solidFill>
+                  <a:srgbClr val="4A6B5D"/>
+                </a:solidFill>
+                <a:latin typeface="Georgia" pitchFamily="34" charset="0"/>
+                <a:ea typeface="Georgia" pitchFamily="34" charset="-122"/>
+                <a:cs typeface="Georgia" pitchFamily="34" charset="-120"/>
+              </a:rPr>
+              <a:t>The dinner</a:t>
+            </a:r>
+            <a:endParaRPr lang="en-US" sz="1550" dirty="0"/>
+          </a:p>
+        </p:txBody>
+      </p:sp>
+      <p:sp>
+        <p:nvSpPr>
+          <p:cNvPr id="12" name="Text 8"/>
+          <p:cNvSpPr/>
+          <p:nvPr/>
+        </p:nvSpPr>
+        <p:spPr>
+          <a:xfrm>
+            <a:off x="3550158" y="3886200"/>
+            <a:ext cx="2361438" cy="548640"/>
+          </a:xfrm>
+          <a:prstGeom prst="rect">
+            <a:avLst/>
+          </a:prstGeom>
+          <a:noFill/>
+          <a:ln/>
+        </p:spPr>
+        <p:txBody>
+          <a:bodyPr wrap="square" lIns="0" tIns="0" rIns="0" bIns="0" rtlCol="0" anchor="t"/>
+          <a:lstStyle/>
+          <a:p>
+            <a:pPr algn="ctr" indent="0" marL="0">
+              <a:lnSpc>
+                <a:spcPts val="1300"/>
+              </a:lnSpc>
+              <a:buNone/>
+            </a:pPr>
+            <a:r>
+              <a:rPr lang="en-US" sz="1050" i="1" dirty="0">
+                <a:solidFill>
+                  <a:srgbClr val="7A7F72"/>
+                </a:solidFill>
+                <a:latin typeface="Arial" pitchFamily="34" charset="0"/>
+                <a:ea typeface="Arial" pitchFamily="34" charset="-122"/>
+                <a:cs typeface="Arial" pitchFamily="34" charset="-120"/>
+              </a:rPr>
+              <a:t>order, ritual, everyone in place</a:t>
+            </a:r>
+            <a:endParaRPr lang="en-US" sz="1050" dirty="0"/>
+          </a:p>
+        </p:txBody>
+      </p:sp>
+      <p:sp>
+        <p:nvSpPr>
+          <p:cNvPr id="13" name="Shape 9"/>
+          <p:cNvSpPr/>
+          <p:nvPr/>
+        </p:nvSpPr>
+        <p:spPr>
+          <a:xfrm>
+            <a:off x="6277356" y="1143000"/>
+            <a:ext cx="2361438" cy="2377440"/>
+          </a:xfrm>
+          <a:prstGeom prst="rect">
+            <a:avLst/>
+          </a:prstGeom>
+          <a:solidFill>
+            <a:srgbClr val="FAF8F1"/>
+          </a:solidFill>
+          <a:ln w="9525">
+            <a:solidFill>
+              <a:srgbClr val="D9D4C4"/>
+            </a:solidFill>
+            <a:prstDash val="solid"/>
+          </a:ln>
+        </p:spPr>
+      </p:sp>
+      <p:pic>
+        <p:nvPicPr>
+          <p:cNvPr id="14" name="Image 2" descr="/Users/dogan/Documents/Vaults/Courses/wiki/classes/media-studies/decks/_build/img/downton-servants.jpg">    </p:cNvPr>
+          <p:cNvPicPr>
+            <a:picLocks noChangeAspect="1"/>
+          </p:cNvPicPr>
+          <p:nvPr/>
+        </p:nvPicPr>
+        <p:blipFill>
+          <a:blip r:embed="rId3"/>
+          <a:stretch>
+            <a:fillRect/>
+          </a:stretch>
+        </p:blipFill>
+        <p:spPr>
+          <a:xfrm>
+            <a:off x="6350508" y="1708714"/>
+            <a:ext cx="2215134" cy="1246013"/>
+          </a:xfrm>
+          <a:prstGeom prst="rect">
+            <a:avLst/>
+          </a:prstGeom>
+        </p:spPr>
+      </p:pic>
+      <p:sp>
+        <p:nvSpPr>
+          <p:cNvPr id="15" name="Text 10"/>
+          <p:cNvSpPr/>
+          <p:nvPr/>
+        </p:nvSpPr>
+        <p:spPr>
+          <a:xfrm>
+            <a:off x="6277356" y="3566160"/>
+            <a:ext cx="2361438" cy="320040"/>
+          </a:xfrm>
+          <a:prstGeom prst="rect">
+            <a:avLst/>
+          </a:prstGeom>
+          <a:noFill/>
+          <a:ln/>
+        </p:spPr>
+        <p:txBody>
+          <a:bodyPr wrap="square" lIns="0" tIns="0" rIns="0" bIns="0" rtlCol="0" anchor="ctr"/>
+          <a:lstStyle/>
+          <a:p>
+            <a:pPr algn="ctr" indent="0" marL="0">
+              <a:buNone/>
+            </a:pPr>
+            <a:r>
+              <a:rPr lang="en-US" sz="1550" dirty="0">
+                <a:solidFill>
+                  <a:srgbClr val="4A6B5D"/>
+                </a:solidFill>
+                <a:latin typeface="Georgia" pitchFamily="34" charset="0"/>
+                <a:ea typeface="Georgia" pitchFamily="34" charset="-122"/>
+                <a:cs typeface="Georgia" pitchFamily="34" charset="-120"/>
+              </a:rPr>
+              <a:t>Below stairs</a:t>
+            </a:r>
+            <a:endParaRPr lang="en-US" sz="1550" dirty="0"/>
+          </a:p>
+        </p:txBody>
+      </p:sp>
+      <p:sp>
+        <p:nvSpPr>
+          <p:cNvPr id="16" name="Text 11"/>
+          <p:cNvSpPr/>
+          <p:nvPr/>
+        </p:nvSpPr>
+        <p:spPr>
+          <a:xfrm>
+            <a:off x="6277356" y="3886200"/>
+            <a:ext cx="2361438" cy="548640"/>
+          </a:xfrm>
+          <a:prstGeom prst="rect">
+            <a:avLst/>
+          </a:prstGeom>
+          <a:noFill/>
+          <a:ln/>
+        </p:spPr>
+        <p:txBody>
+          <a:bodyPr wrap="square" lIns="0" tIns="0" rIns="0" bIns="0" rtlCol="0" anchor="t"/>
+          <a:lstStyle/>
+          <a:p>
+            <a:pPr algn="ctr" indent="0" marL="0">
+              <a:lnSpc>
+                <a:spcPts val="1300"/>
+              </a:lnSpc>
+              <a:buNone/>
+            </a:pPr>
+            <a:r>
+              <a:rPr lang="en-US" sz="1050" i="1" dirty="0">
+                <a:solidFill>
+                  <a:srgbClr val="7A7F72"/>
+                </a:solidFill>
+                <a:latin typeface="Arial" pitchFamily="34" charset="0"/>
+                <a:ea typeface="Arial" pitchFamily="34" charset="-122"/>
+                <a:cs typeface="Arial" pitchFamily="34" charset="-120"/>
+              </a:rPr>
+              <a:t>labor, visible but ranked</a:t>
+            </a:r>
+            <a:endParaRPr lang="en-US" sz="1050" dirty="0"/>
+          </a:p>
+        </p:txBody>
+      </p:sp>
+      <p:sp>
+        <p:nvSpPr>
+          <p:cNvPr id="17" name="Shape 12"/>
+          <p:cNvSpPr/>
+          <p:nvPr/>
+        </p:nvSpPr>
+        <p:spPr>
+          <a:xfrm>
+            <a:off x="9004554" y="1143000"/>
+            <a:ext cx="2361438" cy="2377440"/>
+          </a:xfrm>
+          <a:prstGeom prst="rect">
+            <a:avLst/>
+          </a:prstGeom>
+          <a:solidFill>
+            <a:srgbClr val="FAF8F1"/>
+          </a:solidFill>
+          <a:ln w="9525">
+            <a:solidFill>
+              <a:srgbClr val="D9D4C4"/>
+            </a:solidFill>
+            <a:prstDash val="solid"/>
+          </a:ln>
+        </p:spPr>
+      </p:sp>
+      <p:pic>
+        <p:nvPicPr>
+          <p:cNvPr id="18" name="Image 3" descr="/Users/dogan/Documents/Vaults/Courses/wiki/classes/media-studies/decks/_build/img/downton-village.jpg">    </p:cNvPr>
+          <p:cNvPicPr>
+            <a:picLocks noChangeAspect="1"/>
+          </p:cNvPicPr>
+          <p:nvPr/>
+        </p:nvPicPr>
+        <p:blipFill>
+          <a:blip r:embed="rId4"/>
+          <a:stretch>
+            <a:fillRect/>
+          </a:stretch>
+        </p:blipFill>
+        <p:spPr>
+          <a:xfrm>
+            <a:off x="9077706" y="1708714"/>
+            <a:ext cx="2215134" cy="1246013"/>
+          </a:xfrm>
+          <a:prstGeom prst="rect">
+            <a:avLst/>
+          </a:prstGeom>
+        </p:spPr>
+      </p:pic>
+      <p:sp>
+        <p:nvSpPr>
+          <p:cNvPr id="19" name="Text 13"/>
+          <p:cNvSpPr/>
+          <p:nvPr/>
+        </p:nvSpPr>
+        <p:spPr>
+          <a:xfrm>
+            <a:off x="9004554" y="3566160"/>
+            <a:ext cx="2361438" cy="320040"/>
+          </a:xfrm>
+          <a:prstGeom prst="rect">
+            <a:avLst/>
+          </a:prstGeom>
+          <a:noFill/>
+          <a:ln/>
+        </p:spPr>
+        <p:txBody>
+          <a:bodyPr wrap="square" lIns="0" tIns="0" rIns="0" bIns="0" rtlCol="0" anchor="ctr"/>
+          <a:lstStyle/>
+          <a:p>
+            <a:pPr algn="ctr" indent="0" marL="0">
+              <a:buNone/>
+            </a:pPr>
+            <a:r>
+              <a:rPr lang="en-US" sz="1550" dirty="0">
+                <a:solidFill>
+                  <a:srgbClr val="4A6B5D"/>
+                </a:solidFill>
+                <a:latin typeface="Georgia" pitchFamily="34" charset="0"/>
+                <a:ea typeface="Georgia" pitchFamily="34" charset="-122"/>
+                <a:cs typeface="Georgia" pitchFamily="34" charset="-120"/>
+              </a:rPr>
+              <a:t>The village</a:t>
+            </a:r>
+            <a:endParaRPr lang="en-US" sz="1550" dirty="0"/>
+          </a:p>
+        </p:txBody>
+      </p:sp>
+      <p:sp>
+        <p:nvSpPr>
+          <p:cNvPr id="20" name="Text 14"/>
+          <p:cNvSpPr/>
+          <p:nvPr/>
+        </p:nvSpPr>
+        <p:spPr>
+          <a:xfrm>
+            <a:off x="9004554" y="3886200"/>
+            <a:ext cx="2361438" cy="548640"/>
+          </a:xfrm>
+          <a:prstGeom prst="rect">
+            <a:avLst/>
+          </a:prstGeom>
+          <a:noFill/>
+          <a:ln/>
+        </p:spPr>
+        <p:txBody>
+          <a:bodyPr wrap="square" lIns="0" tIns="0" rIns="0" bIns="0" rtlCol="0" anchor="t"/>
+          <a:lstStyle/>
+          <a:p>
+            <a:pPr algn="ctr" indent="0" marL="0">
+              <a:lnSpc>
+                <a:spcPts val="1300"/>
+              </a:lnSpc>
+              <a:buNone/>
+            </a:pPr>
+            <a:r>
+              <a:rPr lang="en-US" sz="1050" i="1" dirty="0">
+                <a:solidFill>
+                  <a:srgbClr val="7A7F72"/>
+                </a:solidFill>
+                <a:latin typeface="Arial" pitchFamily="34" charset="0"/>
+                <a:ea typeface="Arial" pitchFamily="34" charset="-122"/>
+                <a:cs typeface="Arial" pitchFamily="34" charset="-120"/>
+              </a:rPr>
+              <a:t>a nation with no cities in it</a:t>
+            </a:r>
+            <a:endParaRPr lang="en-US" sz="1050" dirty="0"/>
+          </a:p>
+        </p:txBody>
+      </p:sp>
+      <p:sp>
+        <p:nvSpPr>
+          <p:cNvPr id="21" name="Text 15"/>
+          <p:cNvSpPr/>
+          <p:nvPr/>
+        </p:nvSpPr>
+        <p:spPr>
+          <a:xfrm>
+            <a:off x="822960" y="4526280"/>
+            <a:ext cx="10543032" cy="274320"/>
+          </a:xfrm>
+          <a:prstGeom prst="rect">
+            <a:avLst/>
+          </a:prstGeom>
+          <a:noFill/>
+          <a:ln/>
+        </p:spPr>
+        <p:txBody>
+          <a:bodyPr wrap="square" lIns="0" tIns="0" rIns="0" bIns="0" rtlCol="0" anchor="ctr"/>
+          <a:lstStyle/>
+          <a:p>
+            <a:pPr algn="ctr" indent="0" marL="0">
+              <a:buNone/>
+            </a:pPr>
+            <a:r>
+              <a:rPr lang="en-US" sz="1000" dirty="0">
+                <a:solidFill>
+                  <a:srgbClr val="7A7F72"/>
+                </a:solidFill>
+                <a:latin typeface="Arial" pitchFamily="34" charset="0"/>
+                <a:ea typeface="Arial" pitchFamily="34" charset="-122"/>
+                <a:cs typeface="Arial" pitchFamily="34" charset="-120"/>
+              </a:rPr>
+              <a:t>Downton Abbey (ITV, 2010 to 2015). The Britain brand, selected for global audiences</a:t>
+            </a:r>
+            <a:endParaRPr lang="en-US" sz="1000" dirty="0"/>
+          </a:p>
+        </p:txBody>
+      </p:sp>
+      <p:sp>
+        <p:nvSpPr>
+          <p:cNvPr id="22" name="Shape 16"/>
+          <p:cNvSpPr/>
+          <p:nvPr/>
+        </p:nvSpPr>
+        <p:spPr>
+          <a:xfrm>
+            <a:off x="822960" y="4983480"/>
             <a:ext cx="914400" cy="0"/>
           </a:xfrm>
           <a:prstGeom prst="line">
@@ -5785,14 +7135,14 @@
       </p:sp>
       <p:sp>
         <p:nvSpPr>
-          <p:cNvPr id="7" name="Text 5"/>
-          <p:cNvSpPr/>
-          <p:nvPr/>
-        </p:nvSpPr>
-        <p:spPr>
-          <a:xfrm>
-            <a:off x="822960" y="2743200"/>
-            <a:ext cx="9875520" cy="2103120"/>
+          <p:cNvPr id="23" name="Text 17"/>
+          <p:cNvSpPr/>
+          <p:nvPr/>
+        </p:nvSpPr>
+        <p:spPr>
+          <a:xfrm>
+            <a:off x="822960" y="5120640"/>
+            <a:ext cx="10543032" cy="685800"/>
           </a:xfrm>
           <a:prstGeom prst="rect">
             <a:avLst/>
@@ -5806,28 +7156,28 @@
           <a:p>
             <a:pPr indent="0" marL="0">
               <a:lnSpc>
-                <a:spcPts val="2800"/>
+                <a:spcPts val="1800"/>
               </a:lnSpc>
               <a:buNone/>
             </a:pPr>
             <a:r>
-              <a:rPr lang="en-US" sz="2000" dirty="0">
-                <a:solidFill>
-                  <a:srgbClr val="24313F"/>
+              <a:rPr lang="en-US" sz="1350" i="1" dirty="0">
+                <a:solidFill>
+                  <a:srgbClr val="4A6B5D"/>
                 </a:solidFill>
                 <a:latin typeface="Georgia" pitchFamily="34" charset="0"/>
                 <a:ea typeface="Georgia" pitchFamily="34" charset="-122"/>
                 <a:cs typeface="Georgia" pitchFamily="34" charset="-120"/>
               </a:rPr>
-              <a:t>A stereotype is not a lie. It is a shortcut, and every shortcut has a beneficiary and someone who pays the toll. Ask both questions of every case: who is served by this being the quick version, and who is cost by it? A counter-stereotype, like Carl in UP, registers as surprising only because the shortcut is so well worn.</a:t>
-            </a:r>
-            <a:endParaRPr lang="en-US" sz="2000" dirty="0"/>
-          </a:p>
-        </p:txBody>
-      </p:sp>
-      <p:sp>
-        <p:nvSpPr>
-          <p:cNvPr id="8" name="Shape 6"/>
+              <a:t>Every cell is a selection, and every selection leaves something out: ask of each what a viewer in another country concludes Britain is, and what had to vanish for that conclusion to hold. Then the closer, spoken only: what would a China brand select, and omit?</a:t>
+            </a:r>
+            <a:endParaRPr lang="en-US" sz="1350" dirty="0"/>
+          </a:p>
+        </p:txBody>
+      </p:sp>
+      <p:sp>
+        <p:nvSpPr>
+          <p:cNvPr id="24" name="Shape 18"/>
           <p:cNvSpPr/>
           <p:nvPr/>
         </p:nvSpPr>
@@ -5850,7 +7200,7 @@
       </p:sp>
       <p:sp>
         <p:nvSpPr>
-          <p:cNvPr id="9" name="Text 7"/>
+          <p:cNvPr id="25" name="Text 19"/>
           <p:cNvSpPr/>
           <p:nvPr/>
         </p:nvSpPr>
@@ -5889,7 +7239,7 @@
       </p:sp>
       <p:sp>
         <p:nvSpPr>
-          <p:cNvPr id="10" name="Text 8"/>
+          <p:cNvPr id="26" name="Text 20"/>
           <p:cNvSpPr/>
           <p:nvPr/>
         </p:nvSpPr>

--- a/content/decks/media-studies/media-studies-s1-lesson-11-representation-applied-to-your-own-product.pptx
+++ b/content/decks/media-studies/media-studies-s1-lesson-11-representation-applied-to-your-own-product.pptx
@@ -2402,12 +2402,29 @@
           <a:p>
             <a:pPr indent="0" marL="0">
               <a:lnSpc>
-                <a:spcPts val="2400"/>
+                <a:spcPts val="2300"/>
               </a:lnSpc>
               <a:buNone/>
             </a:pPr>
             <a:r>
-              <a:rPr lang="en-US" sz="1700" dirty="0">
+              <a:rPr lang="en-US" sz="1400" b="1" spc="100" kern="0" dirty="0">
+                <a:solidFill>
+                  <a:srgbClr val="4A6B5D"/>
+                </a:solidFill>
+                <a:latin typeface="Arial" pitchFamily="34" charset="0"/>
+                <a:ea typeface="Arial" pitchFamily="34" charset="-122"/>
+                <a:cs typeface="Arial" pitchFamily="34" charset="-120"/>
+              </a:rPr>
+              <a:t>KEY POINT   </a:t>
+            </a:r>
+            <a:pPr indent="0" marL="0">
+              <a:lnSpc>
+                <a:spcPts val="2300"/>
+              </a:lnSpc>
+              <a:buNone/>
+            </a:pPr>
+            <a:r>
+              <a:rPr lang="en-US" sz="1600" dirty="0">
                 <a:solidFill>
                   <a:srgbClr val="24313F"/>
                 </a:solidFill>
@@ -2415,28 +2432,36 @@
                 <a:ea typeface="Georgia" pitchFamily="34" charset="-122"/>
                 <a:cs typeface="Georgia" pitchFamily="34" charset="-120"/>
               </a:rPr>
-              <a:t>A stereotype is not a lie. It is a shortcut, and every shortcut has a beneficiary and someone who pays the toll. Ask both questions of every case: who is served by this being the quick version, and who is cost by it?</a:t>
-            </a:r>
-            <a:endParaRPr lang="en-US" sz="1700" dirty="0"/>
+              <a:t>A stereotype is not a lie. It is a shortcut. Every shortcut helps someone and costs someone.</a:t>
+            </a:r>
+            <a:endParaRPr lang="en-US" sz="1400" dirty="0"/>
           </a:p>
           <a:p>
             <a:pPr indent="0" marL="0">
               <a:lnSpc>
-                <a:spcPts val="2400"/>
+                <a:spcPts val="2300"/>
               </a:lnSpc>
               <a:buNone/>
             </a:pPr>
-            <a:endParaRPr lang="en-US" sz="1700" dirty="0"/>
-          </a:p>
-          <a:p>
+            <a:r>
+              <a:rPr lang="en-US" sz="1400" b="1" spc="100" kern="0" dirty="0">
+                <a:solidFill>
+                  <a:srgbClr val="4A6B5D"/>
+                </a:solidFill>
+                <a:latin typeface="Arial" pitchFamily="34" charset="0"/>
+                <a:ea typeface="Arial" pitchFamily="34" charset="-122"/>
+                <a:cs typeface="Arial" pitchFamily="34" charset="-120"/>
+              </a:rPr>
+              <a:t>ASK   </a:t>
+            </a:r>
             <a:pPr indent="0" marL="0">
               <a:lnSpc>
-                <a:spcPts val="2400"/>
+                <a:spcPts val="2300"/>
               </a:lnSpc>
               <a:buNone/>
             </a:pPr>
             <a:r>
-              <a:rPr lang="en-US" sz="1700" dirty="0">
+              <a:rPr lang="en-US" sz="1600" dirty="0">
                 <a:solidFill>
                   <a:srgbClr val="24313F"/>
                 </a:solidFill>
@@ -2444,9 +2469,46 @@
                 <a:ea typeface="Georgia" pitchFamily="34" charset="-122"/>
                 <a:cs typeface="Georgia" pitchFamily="34" charset="-120"/>
               </a:rPr>
-              <a:t>A counter-stereotype registers as surprising only because the shortcut is so well worn: a grieving old man as an action hero surprises exactly once, and the surprise is the evidence.</a:t>
-            </a:r>
-            <a:endParaRPr lang="en-US" sz="1700" dirty="0"/>
+              <a:t>Who benefits from the quick version? Who pays for it?</a:t>
+            </a:r>
+            <a:endParaRPr lang="en-US" sz="1400" dirty="0"/>
+          </a:p>
+          <a:p>
+            <a:pPr indent="0" marL="0">
+              <a:lnSpc>
+                <a:spcPts val="2300"/>
+              </a:lnSpc>
+              <a:buNone/>
+            </a:pPr>
+            <a:r>
+              <a:rPr lang="en-US" sz="1400" b="1" spc="100" kern="0" dirty="0">
+                <a:solidFill>
+                  <a:srgbClr val="4A6B5D"/>
+                </a:solidFill>
+                <a:latin typeface="Arial" pitchFamily="34" charset="0"/>
+                <a:ea typeface="Arial" pitchFamily="34" charset="-122"/>
+                <a:cs typeface="Arial" pitchFamily="34" charset="-120"/>
+              </a:rPr>
+              <a:t>TERM   </a:t>
+            </a:r>
+            <a:pPr indent="0" marL="0">
+              <a:lnSpc>
+                <a:spcPts val="2300"/>
+              </a:lnSpc>
+              <a:buNone/>
+            </a:pPr>
+            <a:r>
+              <a:rPr lang="en-US" sz="1600" dirty="0">
+                <a:solidFill>
+                  <a:srgbClr val="24313F"/>
+                </a:solidFill>
+                <a:latin typeface="Georgia" pitchFamily="34" charset="0"/>
+                <a:ea typeface="Georgia" pitchFamily="34" charset="-122"/>
+                <a:cs typeface="Georgia" pitchFamily="34" charset="-120"/>
+              </a:rPr>
+              <a:t>Counter-stereotype: a portrayal that breaks the shortcut. It surprises us, and the surprise is the evidence.</a:t>
+            </a:r>
+            <a:endParaRPr lang="en-US" sz="1400" dirty="0"/>
           </a:p>
         </p:txBody>
       </p:sp>
@@ -2971,12 +3033,29 @@
           <a:p>
             <a:pPr indent="0" marL="0">
               <a:lnSpc>
-                <a:spcPts val="2000"/>
+                <a:spcPts val="1950"/>
               </a:lnSpc>
               <a:buNone/>
             </a:pPr>
             <a:r>
-              <a:rPr lang="en-US" sz="1450" dirty="0">
+              <a:rPr lang="en-US" sz="1200" b="1" spc="100" kern="0" dirty="0">
+                <a:solidFill>
+                  <a:srgbClr val="4A6B5D"/>
+                </a:solidFill>
+                <a:latin typeface="Arial" pitchFamily="34" charset="0"/>
+                <a:ea typeface="Arial" pitchFamily="34" charset="-122"/>
+                <a:cs typeface="Arial" pitchFamily="34" charset="-120"/>
+              </a:rPr>
+              <a:t>THE CASE   </a:t>
+            </a:r>
+            <a:pPr indent="0" marL="0">
+              <a:lnSpc>
+                <a:spcPts val="1950"/>
+              </a:lnSpc>
+              <a:buNone/>
+            </a:pPr>
+            <a:r>
+              <a:rPr lang="en-US" sz="1400" dirty="0">
                 <a:solidFill>
                   <a:srgbClr val="24313F"/>
                 </a:solidFill>
@@ -2984,28 +3063,36 @@
                 <a:ea typeface="Georgia" pitchFamily="34" charset="-122"/>
                 <a:cs typeface="Georgia" pitchFamily="34" charset="-120"/>
               </a:rPr>
-              <a:t>Who never appears cannot complain. Lupin builds its whole heist on the premise: the man in the worker's uniform is invisible to the museum because a class of person has been absented from attention.</a:t>
-            </a:r>
-            <a:endParaRPr lang="en-US" sz="1450" dirty="0"/>
+              <a:t>Lupin's heist works because the museum never looks at the man in the worker's uniform. A whole class of people is left out of attention.</a:t>
+            </a:r>
+            <a:endParaRPr lang="en-US" sz="1200" dirty="0"/>
           </a:p>
           <a:p>
             <a:pPr indent="0" marL="0">
               <a:lnSpc>
-                <a:spcPts val="2000"/>
+                <a:spcPts val="1950"/>
               </a:lnSpc>
               <a:buNone/>
             </a:pPr>
-            <a:endParaRPr lang="en-US" sz="1450" dirty="0"/>
-          </a:p>
-          <a:p>
+            <a:r>
+              <a:rPr lang="en-US" sz="1200" b="1" spc="100" kern="0" dirty="0">
+                <a:solidFill>
+                  <a:srgbClr val="4A6B5D"/>
+                </a:solidFill>
+                <a:latin typeface="Arial" pitchFamily="34" charset="0"/>
+                <a:ea typeface="Arial" pitchFamily="34" charset="-122"/>
+                <a:cs typeface="Arial" pitchFamily="34" charset="-120"/>
+              </a:rPr>
+              <a:t>TASK   </a:t>
+            </a:r>
             <a:pPr indent="0" marL="0">
               <a:lnSpc>
-                <a:spcPts val="2000"/>
+                <a:spcPts val="1950"/>
               </a:lnSpc>
               <a:buNone/>
             </a:pPr>
             <a:r>
-              <a:rPr lang="en-US" sz="1450" dirty="0">
+              <a:rPr lang="en-US" sz="1400" dirty="0">
                 <a:solidFill>
                   <a:srgbClr val="24313F"/>
                 </a:solidFill>
@@ -3013,9 +3100,9 @@
                 <a:ea typeface="Georgia" pitchFamily="34" charset="-122"/>
                 <a:cs typeface="Georgia" pitchFamily="34" charset="-120"/>
               </a:rPr>
-              <a:t>Run the inventory on your own product: who is missing, and did you choose that or default to it?</a:t>
-            </a:r>
-            <a:endParaRPr lang="en-US" sz="1450" dirty="0"/>
+              <a:t>Who is missing from your own product? Did you choose that, or did it happen by default?</a:t>
+            </a:r>
+            <a:endParaRPr lang="en-US" sz="1200" dirty="0"/>
           </a:p>
         </p:txBody>
       </p:sp>
@@ -3805,7 +3892,7 @@
                 <a:ea typeface="Arial" pitchFamily="34" charset="-122"/>
                 <a:cs typeface="Arial" pitchFamily="34" charset="-120"/>
               </a:rPr>
-              <a:t>A2 in Monday; the response cards become evidence Tuesday; LB3 posted on screening quality. The pickups are the homework.</a:t>
+              <a:t>A2 is submitted Monday. Tuesday, the response cards become evidence, and LB3 is posted. The pickup shots are the homework.</a:t>
             </a:r>
             <a:endParaRPr lang="en-US" sz="1150" dirty="0"/>
           </a:p>
@@ -4078,7 +4165,7 @@
                 <a:ea typeface="Georgia" pitchFamily="34" charset="-122"/>
                 <a:cs typeface="Georgia" pitchFamily="34" charset="-120"/>
               </a:rPr>
-              <a:t>Lesson 12. Van Zoonen, Mulvey, and hooks: who is the looking arranged for?</a:t>
+              <a:t>Lesson 12. Van Zoonen, Mulvey, and hooks: who is the camera looking for?</a:t>
             </a:r>
             <a:endParaRPr lang="en-US" sz="2200" dirty="0"/>
           </a:p>
@@ -4380,6 +4467,48 @@
           </a:p>
         </p:txBody>
       </p:sp>
+      <p:sp>
+        <p:nvSpPr>
+          <p:cNvPr id="6" name="Text 4"/>
+          <p:cNvSpPr/>
+          <p:nvPr/>
+        </p:nvSpPr>
+        <p:spPr>
+          <a:xfrm>
+            <a:off x="822960" y="5074920"/>
+            <a:ext cx="7498080" cy="548640"/>
+          </a:xfrm>
+          <a:prstGeom prst="rect">
+            <a:avLst/>
+          </a:prstGeom>
+          <a:noFill/>
+          <a:ln/>
+        </p:spPr>
+        <p:txBody>
+          <a:bodyPr wrap="square" lIns="0" tIns="0" rIns="0" bIns="0" rtlCol="0" anchor="t"/>
+          <a:lstStyle/>
+          <a:p>
+            <a:pPr indent="0" marL="0">
+              <a:lnSpc>
+                <a:spcPts val="2400"/>
+              </a:lnSpc>
+              <a:buNone/>
+            </a:pPr>
+            <a:r>
+              <a:rPr lang="en-US" sz="1800" i="1" dirty="0">
+                <a:solidFill>
+                  <a:srgbClr val="E8EFE7"/>
+                </a:solidFill>
+                <a:latin typeface="Georgia" pitchFamily="34" charset="0"/>
+                <a:ea typeface="Georgia" pitchFamily="34" charset="-122"/>
+                <a:cs typeface="Georgia" pitchFamily="34" charset="-120"/>
+              </a:rPr>
+              <a:t>A media text builds a version of the world. It does not simply show the world.</a:t>
+            </a:r>
+            <a:endParaRPr lang="en-US" sz="1800" dirty="0"/>
+          </a:p>
+        </p:txBody>
+      </p:sp>
     </p:spTree>
   </p:cSld>
   <p:clrMapOvr>
@@ -4787,6 +4916,65 @@
           </a:p>
         </p:txBody>
       </p:sp>
+      <p:sp>
+        <p:nvSpPr>
+          <p:cNvPr id="6" name="Text 4"/>
+          <p:cNvSpPr/>
+          <p:nvPr/>
+        </p:nvSpPr>
+        <p:spPr>
+          <a:xfrm>
+            <a:off x="822960" y="5806440"/>
+            <a:ext cx="10424160" cy="640080"/>
+          </a:xfrm>
+          <a:prstGeom prst="rect">
+            <a:avLst/>
+          </a:prstGeom>
+          <a:noFill/>
+          <a:ln/>
+        </p:spPr>
+        <p:txBody>
+          <a:bodyPr wrap="square" lIns="0" tIns="0" rIns="0" bIns="0" rtlCol="0" anchor="t"/>
+          <a:lstStyle/>
+          <a:p>
+            <a:pPr indent="0" marL="0">
+              <a:lnSpc>
+                <a:spcPts val="1900"/>
+              </a:lnSpc>
+              <a:buNone/>
+            </a:pPr>
+            <a:r>
+              <a:rPr lang="en-US" sz="1200" b="1" spc="100" kern="0" dirty="0">
+                <a:solidFill>
+                  <a:srgbClr val="7A7F72"/>
+                </a:solidFill>
+                <a:latin typeface="Arial" pitchFamily="34" charset="0"/>
+                <a:ea typeface="Arial" pitchFamily="34" charset="-122"/>
+                <a:cs typeface="Arial" pitchFamily="34" charset="-120"/>
+              </a:rPr>
+              <a:t>IN PLAIN WORDS   </a:t>
+            </a:r>
+            <a:pPr indent="0" marL="0">
+              <a:lnSpc>
+                <a:spcPts val="1900"/>
+              </a:lnSpc>
+              <a:buNone/>
+            </a:pPr>
+            <a:r>
+              <a:rPr lang="en-US" sz="1400" i="1" dirty="0">
+                <a:solidFill>
+                  <a:srgbClr val="4A6B5D"/>
+                </a:solidFill>
+                <a:latin typeface="Georgia" pitchFamily="34" charset="0"/>
+                <a:ea typeface="Georgia" pitchFamily="34" charset="-122"/>
+                <a:cs typeface="Georgia" pitchFamily="34" charset="-120"/>
+              </a:rPr>
+              <a:t>How we show things in words and images shapes what they mean in a culture.</a:t>
+            </a:r>
+            <a:endParaRPr lang="en-US" sz="1200" dirty="0"/>
+          </a:p>
+        </p:txBody>
+      </p:sp>
     </p:spTree>
   </p:cSld>
   <p:clrMapOvr>
@@ -5199,23 +5387,26 @@
         <p:spPr>
           <a:xfrm>
             <a:off x="822960" y="5394960"/>
-            <a:ext cx="10058400" cy="457200"/>
-          </a:xfrm>
-          <a:prstGeom prst="rect">
-            <a:avLst/>
-          </a:prstGeom>
-          <a:noFill/>
-          <a:ln/>
-        </p:spPr>
-        <p:txBody>
-          <a:bodyPr wrap="square" lIns="0" tIns="0" rIns="0" bIns="0" rtlCol="0" anchor="ctr"/>
-          <a:lstStyle/>
-          <a:p>
-            <a:pPr indent="0" marL="0">
-              <a:buNone/>
-            </a:pPr>
-            <a:r>
-              <a:rPr lang="en-US" sz="1250" i="1" dirty="0">
+            <a:ext cx="10058400" cy="320040"/>
+          </a:xfrm>
+          <a:prstGeom prst="rect">
+            <a:avLst/>
+          </a:prstGeom>
+          <a:noFill/>
+          <a:ln/>
+        </p:spPr>
+        <p:txBody>
+          <a:bodyPr wrap="square" lIns="0" tIns="0" rIns="0" bIns="0" rtlCol="0" anchor="t"/>
+          <a:lstStyle/>
+          <a:p>
+            <a:pPr indent="0" marL="0">
+              <a:lnSpc>
+                <a:spcPts val="1700"/>
+              </a:lnSpc>
+              <a:buNone/>
+            </a:pPr>
+            <a:r>
+              <a:rPr lang="en-US" sz="1050" b="1" spc="100" kern="0" dirty="0">
                 <a:solidFill>
                   <a:srgbClr val="7A7F72"/>
                 </a:solidFill>
@@ -5223,9 +5414,26 @@
                 <a:ea typeface="Arial" pitchFamily="34" charset="-122"/>
                 <a:cs typeface="Arial" pitchFamily="34" charset="-120"/>
               </a:rPr>
-              <a:t>The turn inward: my C1 product represents ... as ... . Every day this week tests that sentence.</a:t>
-            </a:r>
-            <a:endParaRPr lang="en-US" sz="1250" dirty="0"/>
+              <a:t>YOUR SENTENCE   </a:t>
+            </a:r>
+            <a:pPr indent="0" marL="0">
+              <a:lnSpc>
+                <a:spcPts val="1700"/>
+              </a:lnSpc>
+              <a:buNone/>
+            </a:pPr>
+            <a:r>
+              <a:rPr lang="en-US" sz="1250" dirty="0">
+                <a:solidFill>
+                  <a:srgbClr val="7A7F72"/>
+                </a:solidFill>
+                <a:latin typeface="Georgia" pitchFamily="34" charset="0"/>
+                <a:ea typeface="Georgia" pitchFamily="34" charset="-122"/>
+                <a:cs typeface="Georgia" pitchFamily="34" charset="-120"/>
+              </a:rPr>
+              <a:t>My Component 1 product represents ... as ... . Every day this week tests that sentence.</a:t>
+            </a:r>
+            <a:endParaRPr lang="en-US" sz="1050" dirty="0"/>
           </a:p>
         </p:txBody>
       </p:sp>
@@ -5846,7 +6054,7 @@
         <p:spPr>
           <a:xfrm>
             <a:off x="822960" y="5486400"/>
-            <a:ext cx="10241280" cy="685800"/>
+            <a:ext cx="10241280" cy="548640"/>
           </a:xfrm>
           <a:prstGeom prst="rect">
             <a:avLst/>
@@ -5865,7 +6073,7 @@
               <a:buNone/>
             </a:pPr>
             <a:r>
-              <a:rPr lang="en-US" sz="1250" i="1" dirty="0">
+              <a:rPr lang="en-US" sz="1050" b="1" spc="100" kern="0" dirty="0">
                 <a:solidFill>
                   <a:srgbClr val="7A7F72"/>
                 </a:solidFill>
@@ -5873,9 +6081,63 @@
                 <a:ea typeface="Arial" pitchFamily="34" charset="-122"/>
                 <a:cs typeface="Arial" pitchFamily="34" charset="-120"/>
               </a:rPr>
-              <a:t>Run as Four Corners: dominant, negotiated, oppositional, plus an abstain-and-justify center. Could your C1 product survive an oppositional reading? The disagreement is the theory working.</a:t>
-            </a:r>
-            <a:endParaRPr lang="en-US" sz="1250" dirty="0"/>
+              <a:t>TASK   </a:t>
+            </a:r>
+            <a:pPr indent="0" marL="0">
+              <a:lnSpc>
+                <a:spcPts val="1700"/>
+              </a:lnSpc>
+              <a:buNone/>
+            </a:pPr>
+            <a:r>
+              <a:rPr lang="en-US" sz="1250" dirty="0">
+                <a:solidFill>
+                  <a:srgbClr val="7A7F72"/>
+                </a:solidFill>
+                <a:latin typeface="Georgia" pitchFamily="34" charset="0"/>
+                <a:ea typeface="Georgia" pitchFamily="34" charset="-122"/>
+                <a:cs typeface="Georgia" pitchFamily="34" charset="-120"/>
+              </a:rPr>
+              <a:t>Four Corners: dominant, negotiated, oppositional, or the center (abstain and justify).</a:t>
+            </a:r>
+            <a:endParaRPr lang="en-US" sz="1050" dirty="0"/>
+          </a:p>
+          <a:p>
+            <a:pPr indent="0" marL="0">
+              <a:lnSpc>
+                <a:spcPts val="1700"/>
+              </a:lnSpc>
+              <a:buNone/>
+            </a:pPr>
+            <a:r>
+              <a:rPr lang="en-US" sz="1050" b="1" spc="100" kern="0" dirty="0">
+                <a:solidFill>
+                  <a:srgbClr val="7A7F72"/>
+                </a:solidFill>
+                <a:latin typeface="Arial" pitchFamily="34" charset="0"/>
+                <a:ea typeface="Arial" pitchFamily="34" charset="-122"/>
+                <a:cs typeface="Arial" pitchFamily="34" charset="-120"/>
+              </a:rPr>
+              <a:t>CHECK   </a:t>
+            </a:r>
+            <a:pPr indent="0" marL="0">
+              <a:lnSpc>
+                <a:spcPts val="1700"/>
+              </a:lnSpc>
+              <a:buNone/>
+            </a:pPr>
+            <a:r>
+              <a:rPr lang="en-US" sz="1250" dirty="0">
+                <a:solidFill>
+                  <a:srgbClr val="7A7F72"/>
+                </a:solidFill>
+                <a:latin typeface="Georgia" pitchFamily="34" charset="0"/>
+                <a:ea typeface="Georgia" pitchFamily="34" charset="-122"/>
+                <a:cs typeface="Georgia" pitchFamily="34" charset="-120"/>
+              </a:rPr>
+              <a:t>Could your Component 1 product survive an oppositional reading?</a:t>
+            </a:r>
+            <a:endParaRPr lang="en-US" sz="1050" dirty="0"/>
           </a:p>
         </p:txBody>
       </p:sp>
@@ -6224,12 +6486,12 @@
           <a:p>
             <a:pPr indent="0" marL="0">
               <a:lnSpc>
-                <a:spcPts val="2500"/>
+                <a:spcPts val="2300"/>
               </a:lnSpc>
               <a:buNone/>
             </a:pPr>
             <a:r>
-              <a:rPr lang="en-US" sz="1750" dirty="0">
+              <a:rPr lang="en-US" sz="1600" dirty="0">
                 <a:solidFill>
                   <a:srgbClr val="24313F"/>
                 </a:solidFill>
@@ -6237,9 +6499,83 @@
                 <a:ea typeface="Georgia" pitchFamily="34" charset="-122"/>
                 <a:cs typeface="Georgia" pitchFamily="34" charset="-120"/>
               </a:rPr>
-              <a:t>A studio portrait is a built thing: pose, light, backdrop, retouch. Take one public figure and three found images, an official portrait, a news photo, a fan edit, and list what each version selects, combines, and asks you to conclude. The construction changed; the person did not.</a:t>
-            </a:r>
-            <a:endParaRPr lang="en-US" sz="1750" dirty="0"/>
+              <a:t>A studio portrait is a built thing: pose, light, backdrop, retouching.</a:t>
+            </a:r>
+            <a:endParaRPr lang="en-US" sz="1600" dirty="0"/>
+          </a:p>
+          <a:p>
+            <a:pPr indent="0" marL="0">
+              <a:lnSpc>
+                <a:spcPts val="2300"/>
+              </a:lnSpc>
+              <a:buNone/>
+            </a:pPr>
+            <a:r>
+              <a:rPr lang="en-US" sz="1400" b="1" spc="100" kern="0" dirty="0">
+                <a:solidFill>
+                  <a:srgbClr val="4A6B5D"/>
+                </a:solidFill>
+                <a:latin typeface="Arial" pitchFamily="34" charset="0"/>
+                <a:ea typeface="Arial" pitchFamily="34" charset="-122"/>
+                <a:cs typeface="Arial" pitchFamily="34" charset="-120"/>
+              </a:rPr>
+              <a:t>TASK   </a:t>
+            </a:r>
+            <a:pPr indent="0" marL="0">
+              <a:lnSpc>
+                <a:spcPts val="2300"/>
+              </a:lnSpc>
+              <a:buNone/>
+            </a:pPr>
+            <a:r>
+              <a:rPr lang="en-US" sz="1600" dirty="0">
+                <a:solidFill>
+                  <a:srgbClr val="24313F"/>
+                </a:solidFill>
+                <a:latin typeface="Georgia" pitchFamily="34" charset="0"/>
+                <a:ea typeface="Georgia" pitchFamily="34" charset="-122"/>
+                <a:cs typeface="Georgia" pitchFamily="34" charset="-120"/>
+              </a:rPr>
+              <a:t>Take one public figure and three images: official portrait, news photo, fan edit. List what each version selects, and what it wants you to conclude.</a:t>
+            </a:r>
+            <a:endParaRPr lang="en-US" sz="1600" dirty="0"/>
+          </a:p>
+          <a:p>
+            <a:pPr indent="0" marL="0">
+              <a:lnSpc>
+                <a:spcPts val="2300"/>
+              </a:lnSpc>
+              <a:buNone/>
+            </a:pPr>
+            <a:r>
+              <a:rPr lang="en-US" sz="1400" b="1" spc="100" kern="0" dirty="0">
+                <a:solidFill>
+                  <a:srgbClr val="4A6B5D"/>
+                </a:solidFill>
+                <a:latin typeface="Arial" pitchFamily="34" charset="0"/>
+                <a:ea typeface="Arial" pitchFamily="34" charset="-122"/>
+                <a:cs typeface="Arial" pitchFamily="34" charset="-120"/>
+              </a:rPr>
+              <a:t>KEY POINT   </a:t>
+            </a:r>
+            <a:pPr indent="0" marL="0">
+              <a:lnSpc>
+                <a:spcPts val="2300"/>
+              </a:lnSpc>
+              <a:buNone/>
+            </a:pPr>
+            <a:r>
+              <a:rPr lang="en-US" sz="1600" dirty="0">
+                <a:solidFill>
+                  <a:srgbClr val="24313F"/>
+                </a:solidFill>
+                <a:latin typeface="Georgia" pitchFamily="34" charset="0"/>
+                <a:ea typeface="Georgia" pitchFamily="34" charset="-122"/>
+                <a:cs typeface="Georgia" pitchFamily="34" charset="-120"/>
+              </a:rPr>
+              <a:t>The construction changed. The person did not.</a:t>
+            </a:r>
+            <a:endParaRPr lang="en-US" sz="1600" dirty="0"/>
           </a:p>
         </p:txBody>
       </p:sp>
@@ -6418,6 +6754,65 @@
           </a:p>
         </p:txBody>
       </p:sp>
+      <p:sp>
+        <p:nvSpPr>
+          <p:cNvPr id="6" name="Text 4"/>
+          <p:cNvSpPr/>
+          <p:nvPr/>
+        </p:nvSpPr>
+        <p:spPr>
+          <a:xfrm>
+            <a:off x="822960" y="5806440"/>
+            <a:ext cx="10424160" cy="640080"/>
+          </a:xfrm>
+          <a:prstGeom prst="rect">
+            <a:avLst/>
+          </a:prstGeom>
+          <a:noFill/>
+          <a:ln/>
+        </p:spPr>
+        <p:txBody>
+          <a:bodyPr wrap="square" lIns="0" tIns="0" rIns="0" bIns="0" rtlCol="0" anchor="t"/>
+          <a:lstStyle/>
+          <a:p>
+            <a:pPr indent="0" marL="0">
+              <a:lnSpc>
+                <a:spcPts val="1900"/>
+              </a:lnSpc>
+              <a:buNone/>
+            </a:pPr>
+            <a:r>
+              <a:rPr lang="en-US" sz="1200" b="1" spc="100" kern="0" dirty="0">
+                <a:solidFill>
+                  <a:srgbClr val="7A7F72"/>
+                </a:solidFill>
+                <a:latin typeface="Arial" pitchFamily="34" charset="0"/>
+                <a:ea typeface="Arial" pitchFamily="34" charset="-122"/>
+                <a:cs typeface="Arial" pitchFamily="34" charset="-120"/>
+              </a:rPr>
+              <a:t>IN PLAIN WORDS   </a:t>
+            </a:r>
+            <a:pPr indent="0" marL="0">
+              <a:lnSpc>
+                <a:spcPts val="1900"/>
+              </a:lnSpc>
+              <a:buNone/>
+            </a:pPr>
+            <a:r>
+              <a:rPr lang="en-US" sz="1400" i="1" dirty="0">
+                <a:solidFill>
+                  <a:srgbClr val="4A6B5D"/>
+                </a:solidFill>
+                <a:latin typeface="Georgia" pitchFamily="34" charset="0"/>
+                <a:ea typeface="Georgia" pitchFamily="34" charset="-122"/>
+                <a:cs typeface="Georgia" pitchFamily="34" charset="-120"/>
+              </a:rPr>
+              <a:t>A stereotype shrinks a group to a few traits, treats those traits as natural, and freezes them there.</a:t>
+            </a:r>
+            <a:endParaRPr lang="en-US" sz="1200" dirty="0"/>
+          </a:p>
+        </p:txBody>
+      </p:sp>
     </p:spTree>
   </p:cSld>
   <p:clrMapOvr>
@@ -7156,12 +7551,29 @@
           <a:p>
             <a:pPr indent="0" marL="0">
               <a:lnSpc>
-                <a:spcPts val="1800"/>
+                <a:spcPts val="1750"/>
               </a:lnSpc>
               <a:buNone/>
             </a:pPr>
             <a:r>
-              <a:rPr lang="en-US" sz="1350" i="1" dirty="0">
+              <a:rPr lang="en-US" sz="1100" b="1" spc="100" kern="0" dirty="0">
+                <a:solidFill>
+                  <a:srgbClr val="4A6B5D"/>
+                </a:solidFill>
+                <a:latin typeface="Arial" pitchFamily="34" charset="0"/>
+                <a:ea typeface="Arial" pitchFamily="34" charset="-122"/>
+                <a:cs typeface="Arial" pitchFamily="34" charset="-120"/>
+              </a:rPr>
+              <a:t>TASK   </a:t>
+            </a:r>
+            <a:pPr indent="0" marL="0">
+              <a:lnSpc>
+                <a:spcPts val="1750"/>
+              </a:lnSpc>
+              <a:buNone/>
+            </a:pPr>
+            <a:r>
+              <a:rPr lang="en-US" sz="1300" dirty="0">
                 <a:solidFill>
                   <a:srgbClr val="4A6B5D"/>
                 </a:solidFill>
@@ -7169,9 +7581,46 @@
                 <a:ea typeface="Georgia" pitchFamily="34" charset="-122"/>
                 <a:cs typeface="Georgia" pitchFamily="34" charset="-120"/>
               </a:rPr>
-              <a:t>Every cell is a selection, and every selection leaves something out: ask of each what a viewer in another country concludes Britain is, and what had to vanish for that conclusion to hold. Then the closer, spoken only: what would a China brand select, and omit?</a:t>
-            </a:r>
-            <a:endParaRPr lang="en-US" sz="1350" dirty="0"/>
+              <a:t>For each cell, ask: what does a foreign viewer conclude Britain is? What had to disappear for that conclusion to hold?</a:t>
+            </a:r>
+            <a:endParaRPr lang="en-US" sz="1100" dirty="0"/>
+          </a:p>
+          <a:p>
+            <a:pPr indent="0" marL="0">
+              <a:lnSpc>
+                <a:spcPts val="1750"/>
+              </a:lnSpc>
+              <a:buNone/>
+            </a:pPr>
+            <a:r>
+              <a:rPr lang="en-US" sz="1100" b="1" spc="100" kern="0" dirty="0">
+                <a:solidFill>
+                  <a:srgbClr val="4A6B5D"/>
+                </a:solidFill>
+                <a:latin typeface="Arial" pitchFamily="34" charset="0"/>
+                <a:ea typeface="Arial" pitchFamily="34" charset="-122"/>
+                <a:cs typeface="Arial" pitchFamily="34" charset="-120"/>
+              </a:rPr>
+              <a:t>SPOKEN ASIDE   </a:t>
+            </a:r>
+            <a:pPr indent="0" marL="0">
+              <a:lnSpc>
+                <a:spcPts val="1750"/>
+              </a:lnSpc>
+              <a:buNone/>
+            </a:pPr>
+            <a:r>
+              <a:rPr lang="en-US" sz="1300" dirty="0">
+                <a:solidFill>
+                  <a:srgbClr val="4A6B5D"/>
+                </a:solidFill>
+                <a:latin typeface="Georgia" pitchFamily="34" charset="0"/>
+                <a:ea typeface="Georgia" pitchFamily="34" charset="-122"/>
+                <a:cs typeface="Georgia" pitchFamily="34" charset="-120"/>
+              </a:rPr>
+              <a:t>What would a China brand select, and what would it leave out?</a:t>
+            </a:r>
+            <a:endParaRPr lang="en-US" sz="1100" dirty="0"/>
           </a:p>
         </p:txBody>
       </p:sp>

--- a/content/decks/media-studies/media-studies-s1-lesson-11-representation-applied-to-your-own-product.pptx
+++ b/content/decks/media-studies/media-studies-s1-lesson-11-representation-applied-to-your-own-product.pptx
@@ -2178,7 +2178,7 @@
                 <a:ea typeface="Arial" pitchFamily="34" charset="-122"/>
                 <a:cs typeface="Arial" pitchFamily="34" charset="-120"/>
               </a:rPr>
-              <a:t>Six days  ·  Monday 26 October to Tuesday 3 November</a:t>
+              <a:t>Five days  ·  Monday 26 October to Monday 2 November</a:t>
             </a:r>
             <a:endParaRPr lang="en-US" sz="1300" dirty="0"/>
           </a:p>
@@ -3892,7 +3892,7 @@
                 <a:ea typeface="Arial" pitchFamily="34" charset="-122"/>
                 <a:cs typeface="Arial" pitchFamily="34" charset="-120"/>
               </a:rPr>
-              <a:t>A2 is submitted Monday. Tuesday, the response cards become evidence, and LB3 is posted. The pickup shots are the homework.</a:t>
+              <a:t>A2 goes in Monday. The screening Monday 2 November turns response cards into evidence, and LB3 is posted. The pickup shots are the homework.</a:t>
             </a:r>
             <a:endParaRPr lang="en-US" sz="1150" dirty="0"/>
           </a:p>
